--- a/CostVision-CAPEE-Implementation-Options.pptx
+++ b/CostVision-CAPEE-Implementation-Options.pptx
@@ -10896,7 +10896,7 @@
         <p:spPr>
           <a:xfrm>
             <a:off x="630936" y="6547104"/>
-            <a:ext cx="10954512" cy="45720"/>
+            <a:ext cx="10954512" cy="109728"/>
           </a:xfrm>
           <a:prstGeom prst="rect">
             <a:avLst/>
@@ -14034,7 +14034,7 @@
         <p:spPr>
           <a:xfrm>
             <a:off x="630936" y="6665976"/>
-            <a:ext cx="5166360" cy="-45720"/>
+            <a:ext cx="5166360" cy="109728"/>
           </a:xfrm>
           <a:prstGeom prst="rect">
             <a:avLst/>
@@ -14208,7 +14208,7 @@
         <p:spPr>
           <a:xfrm>
             <a:off x="6419088" y="6665976"/>
-            <a:ext cx="5166360" cy="-45720"/>
+            <a:ext cx="5166360" cy="109728"/>
           </a:xfrm>
           <a:prstGeom prst="rect">
             <a:avLst/>
@@ -24041,7 +24041,7 @@
         <p:spPr>
           <a:xfrm>
             <a:off x="630936" y="6419088"/>
-            <a:ext cx="10954512" cy="0"/>
+            <a:ext cx="10954512" cy="109728"/>
           </a:xfrm>
           <a:prstGeom prst="rect">
             <a:avLst/>
@@ -29155,7 +29155,7 @@
         <p:spPr>
           <a:xfrm>
             <a:off x="630936" y="6510528"/>
-            <a:ext cx="10954512" cy="45720"/>
+            <a:ext cx="10954512" cy="109728"/>
           </a:xfrm>
           <a:prstGeom prst="rect">
             <a:avLst/>
@@ -36170,7 +36170,7 @@
         <p:spPr>
           <a:xfrm>
             <a:off x="630936" y="6547104"/>
-            <a:ext cx="10954512" cy="45720"/>
+            <a:ext cx="10954512" cy="109728"/>
           </a:xfrm>
           <a:prstGeom prst="rect">
             <a:avLst/>
@@ -37691,7 +37691,7 @@
         <p:spPr>
           <a:xfrm>
             <a:off x="630936" y="6528816"/>
-            <a:ext cx="10954512" cy="64008"/>
+            <a:ext cx="10954512" cy="109728"/>
           </a:xfrm>
           <a:prstGeom prst="rect">
             <a:avLst/>

--- a/CostVision-CAPEE-Implementation-Options.pptx
+++ b/CostVision-CAPEE-Implementation-Options.pptx
@@ -665,7 +665,7 @@
           <a:lstStyle/>
           <a:p>
             <a:r>
-              <a:t>This is what we would actually get out of the trial, and I want to be concrete because these four numbers do not exist today. First, how close is it. We cost the parts, compare against what we paid, and report the error. The test I would use is whether the real error lands inside the range the tool predicted for itself. A tool that is wrong and says so is usable. One that is wrong and confident is not. Second, how often the engineer has to step in. On our own eight test parts, six went straight through and two stopped and asked. I need that figure on our parts. Third, the time saving, measured by doing the same parts both ways. Fourth, what it refused and whether it was right to. And the green strip is the reason to do it even if the answer disappoints us. Right now nobody can state an accuracy figure at all, and every conversation about this tool stops there.</a:t>
+              <a:t>This is what we would actually get out of the trial, and I want to be concrete because these four numbers do not exist today. First, how close is it. We cost the parts, compare against what we paid, and report the error. The test I would use is whether the real error lands inside the range the tool predicted for itself. A tool that is wrong and says so is usable. One that is wrong and confident is not. Second, how often the engineer has to step in. On our own eight test parts, once the material family was given, six went straight through and two stopped and asked. Given nothing at all, all eight stop and ask, because a solid model cannot tell steel from aluminium. In a bulk run that answer comes off the part master rather than from a person. I need that figure on JLR parts. Third, the time saving, measured by doing the same parts both ways. Fourth, what it refused and whether it was right to. And the green strip is the reason to do it even if the answer disappoints us. Right now nobody can state an accuracy figure at all, and every conversation about this tool stops there.</a:t>
             </a:r>
           </a:p>
         </p:txBody>
@@ -805,7 +805,7 @@
           <a:lstStyle/>
           <a:p>
             <a:r>
-              <a:t>Option two is a different thing from Option one, and I want to be clear about that. Option one saves the engineer typing. Option two gives us something we do not have at all. Today we cost the parts we have time to cost. A basket of several hundred gets sampled or estimated by analogy, because there are not enough engineer-hours. Option two costs the whole basket in one run. The blue box is important. The agent marshals the run but it never sets a price. Every number still comes out of the same engine at the same rates with the same checks. And the amber box is the honest position. The engine already works standalone and an agent already exists that can cost a part. What does not exist is the run itself.</a:t>
+              <a:t>Option two is a different thing from Option one, and I want to be clear about that. Option one saves the engineer typing. Option two gives us something we do not have at all. Today we cost the parts we have time to cost. A basket of several hundred gets sampled or estimated by analogy, because there are not enough engineer-hours. Option two costs the whole basket in one run. The blue box is important. The agent marshals the run but it never sets a price. Every number still comes out of the same engine at the same rates. It does choose the inputs, though, so the geometry checks that run on the CAD route today have to be wired onto this one, and that is on the list on slide fifteen. The amber box is the honest position. The engine already works standalone and an agent already exists that can cost a part. What does not exist is the run itself.</a:t>
             </a:r>
           </a:p>
         </p:txBody>
@@ -875,7 +875,7 @@
           <a:lstStyle/>
           <a:p>
             <a:r>
-              <a:t>Here is what a run actually does and what it costs in machine time. These timings are measured, this month, on our own parts, not estimated. A part takes about one and a quarter seconds to measure. Working out the hundred and eighty-two values takes five thousandths of a second. Costing it takes less than one. So five hundred parts is about five minutes on two workers. The point of the blue strip at the bottom is that the computer is not the constraint here. Pulling together the part list, the CAD files and our own rate data is the work. The machine finishes while you are getting a coffee.</a:t>
+              <a:t>Here is what a run actually does and what it costs in machine time. The forty-part row is measured, this month, on our own production parts. A part takes between one and three seconds to measure depending on how big the file is. Running the rules and costing it takes five thousandths of a second, so the measuring is the whole of it. Forty parts took thirty-one seconds on two workers with nothing reused, and the rows below that are that same rate carried forward, so five hundred parts is about six and a half minutes. The point of the blue strip at the bottom is that the computer is not the constraint here. Pulling together the part list, the CAD files and our own rate data is the work. The machine finishes while you are getting a coffee.</a:t>
             </a:r>
           </a:p>
         </p:txBody>
@@ -945,7 +945,7 @@
           <a:lstStyle/>
           <a:p>
             <a:r>
-              <a:t>I would rather show you this list than have it come out later. Five things. The first two are the ones that would stop me signing off a bulk run for anything audited. The rate book today is a single row that gets overwritten, so change a rate and the old one is gone. And finished costings are not saved at all. Together that means a five-hundred-part run produces numbers you cannot reproduce next quarter. The third is smaller than it sounds: region and volume already work in the screens, they are just not passed through to the automated route. Fourth, gear does not reach the automated route at all, so a basket with gears in it would quietly skip them. Fifth is the run itself, which is the actual new build. The green strip is the good news. The engine needs no change. We checked that by running it on its own, outside the application.</a:t>
+              <a:t>I would rather show you this list than have it come out later. Six things. The first two are the ones that would stop me signing off a bulk run for anything audited. The rate book today is a single row that gets overwritten, so change a rate and the old one is gone. And finished costings are not saved at all. Together that means a five-hundred-part run produces numbers you cannot reproduce next quarter. The third is smaller than it sounds: region and volume already work in the screens, they are just not passed through to the automated route. Fourth, gear does not reach the automated route at all, so a basket with gears in it would quietly skip them. Fifth is the geometry safety checks. They run on the CAD route today and the automated route only validates the fields, so they have to be wired on before anyone leaves a run unattended. Sixth is the run itself, which is the actual new build. The green strip is the good news. The engine needs no change. We checked that by running it on its own, outside the application.</a:t>
             </a:r>
           </a:p>
         </p:txBody>
@@ -1505,7 +1505,7 @@
           <a:lstStyle/>
           <a:p>
             <a:r>
-              <a:t>This is the problem we are trying to fix. Today an engineer opens the model, reads the drawing, and types the numbers in. How many numbers depends on the part. A machined part is twelve boxes. A pressing is sixty-nine. The time matters, but the second point matters more. Two of our engineers costing the same part will not type the same numbers, so we end up with two answers for one part and no way to say which is right. On the right is what the tool does instead. It works out a hundred and eighty-two values and a hundred and thirty-nine of them go straight into a named box on the form. The blue box is the distinction I want people to hold on to. Measuring the model is ordinary software doing geometry. The AI only reads the writing on the drawing, and we check everything it reads.</a:t>
+              <a:t>This is the problem we are trying to fix. Today an engineer opens the model, reads the drawing, and types the numbers in. How many numbers depends on the part. A machined part is twelve boxes. A pressing is sixty-nine. The time matters, but the second point matters more. Two of our engineers costing the same part will not type the same numbers, so we end up with two answers for one part and no way to say which is right. On the right is what the tool does instead. A hundred and sixty-five costing rules turn the measurements into the values the form needs, and a hundred and forty-nine of those write straight into a named box. One part uses its own type's rules, between nine and eighteen of them. The blue box is the distinction I want people to hold on to. Measuring the model is ordinary software doing geometry. The AI only reads the writing on the drawing, and we check everything it reads.</a:t>
             </a:r>
           </a:p>
         </p:txBody>
@@ -1785,7 +1785,7 @@
           <a:lstStyle/>
           <a:p>
             <a:r>
-              <a:t>You asked last time what would actually get handed over. Six things, and the sizes come straight out of the software. The measuring engine is Python, which is the normal choice for measurement work. The rest is TypeScript, common in business software. Neither is odd and neither ties us to one supplier. The fourth row is the biggest piece and it is worth a word: that is where the tool works out a hundred and eighty-two values and decides what to ask the engineer for. The amber box is the one practical thing worth raising with IT now, because it decides where this can live.</a:t>
+              <a:t>You asked last time what would actually get handed over. Six things, and the sizes come straight out of the software. The measuring engine is Python, which is the normal choice for measurement work. The rest is TypeScript, common in business software. Neither is odd and neither ties us to one supplier. The fourth row is the biggest piece and it is worth a word: that is the hundred and sixty-five costing rules that fill the form and decide what to ask the engineer for. The amber box is the one practical thing worth raising with IT now, because it decides where this can live.</a:t>
             </a:r>
           </a:p>
         </p:txBody>
@@ -8143,7 +8143,7 @@
         <p:spPr>
           <a:xfrm>
             <a:off x="411480" y="2103120"/>
-            <a:ext cx="11365992" cy="896112"/>
+            <a:ext cx="11365992" cy="932688"/>
           </a:xfrm>
           <a:prstGeom prst="roundRect">
             <a:avLst>
@@ -8191,7 +8191,7 @@
         <p:spPr>
           <a:xfrm>
             <a:off x="411480" y="2103120"/>
-            <a:ext cx="68580" cy="896112"/>
+            <a:ext cx="68580" cy="932688"/>
           </a:xfrm>
           <a:prstGeom prst="rect">
             <a:avLst/>
@@ -8371,8 +8371,8 @@
         </p:nvSpPr>
         <p:spPr>
           <a:xfrm>
-            <a:off x="411480" y="3072384"/>
-            <a:ext cx="11365992" cy="896112"/>
+            <a:off x="411480" y="3090672"/>
+            <a:ext cx="11365992" cy="932688"/>
           </a:xfrm>
           <a:prstGeom prst="roundRect">
             <a:avLst>
@@ -8419,8 +8419,8 @@
         </p:nvSpPr>
         <p:spPr>
           <a:xfrm>
-            <a:off x="411480" y="3072384"/>
-            <a:ext cx="68580" cy="896112"/>
+            <a:off x="411480" y="3090672"/>
+            <a:ext cx="68580" cy="932688"/>
           </a:xfrm>
           <a:prstGeom prst="rect">
             <a:avLst/>
@@ -8463,7 +8463,7 @@
         </p:nvSpPr>
         <p:spPr>
           <a:xfrm>
-            <a:off x="658368" y="3236976"/>
+            <a:off x="658368" y="3255264"/>
             <a:ext cx="438912" cy="438912"/>
           </a:xfrm>
           <a:prstGeom prst="ellipse">
@@ -8516,7 +8516,7 @@
         </p:nvSpPr>
         <p:spPr>
           <a:xfrm>
-            <a:off x="1325880" y="3182112"/>
+            <a:off x="1325880" y="3200400"/>
             <a:ext cx="10241280" cy="256032"/>
           </a:xfrm>
           <a:prstGeom prst="rect">
@@ -8558,7 +8558,7 @@
         </p:nvSpPr>
         <p:spPr>
           <a:xfrm>
-            <a:off x="1325880" y="3465576"/>
+            <a:off x="1325880" y="3483864"/>
             <a:ext cx="10241280" cy="438912"/>
           </a:xfrm>
           <a:prstGeom prst="rect">
@@ -8587,7 +8587,7 @@
                 </a:solidFill>
                 <a:latin typeface="Calibri"/>
               </a:rPr>
-              <a:t>Count the values the engineer changed after the tool filled them, and the parts where the tool stopped and asked. On our own eight sample parts, six costed straight through and two needed an answer. We need that figure on JLR parts, not ours.</a:t>
+              <a:t>Count the values the engineer changed after the tool filled them, and the parts where the tool stopped and asked. On our own eight parts, with the material family given, six costed straight through and two stopped. Without it all eight stop, because a solid model cannot tell steel from aluminium. We need that figure on JLR parts, not ours.</a:t>
             </a:r>
           </a:p>
         </p:txBody>
@@ -8600,8 +8600,8 @@
         </p:nvSpPr>
         <p:spPr>
           <a:xfrm>
-            <a:off x="411480" y="4041648"/>
-            <a:ext cx="11365992" cy="896112"/>
+            <a:off x="411480" y="4078224"/>
+            <a:ext cx="11365992" cy="932688"/>
           </a:xfrm>
           <a:prstGeom prst="roundRect">
             <a:avLst>
@@ -8648,8 +8648,8 @@
         </p:nvSpPr>
         <p:spPr>
           <a:xfrm>
-            <a:off x="411480" y="4041648"/>
-            <a:ext cx="68580" cy="896112"/>
+            <a:off x="411480" y="4078224"/>
+            <a:ext cx="68580" cy="932688"/>
           </a:xfrm>
           <a:prstGeom prst="rect">
             <a:avLst/>
@@ -8692,7 +8692,7 @@
         </p:nvSpPr>
         <p:spPr>
           <a:xfrm>
-            <a:off x="658368" y="4206240"/>
+            <a:off x="658368" y="4242816"/>
             <a:ext cx="438912" cy="438912"/>
           </a:xfrm>
           <a:prstGeom prst="ellipse">
@@ -8745,7 +8745,7 @@
         </p:nvSpPr>
         <p:spPr>
           <a:xfrm>
-            <a:off x="1325880" y="4151376"/>
+            <a:off x="1325880" y="4187952"/>
             <a:ext cx="10241280" cy="256032"/>
           </a:xfrm>
           <a:prstGeom prst="rect">
@@ -8787,7 +8787,7 @@
         </p:nvSpPr>
         <p:spPr>
           <a:xfrm>
-            <a:off x="1325880" y="4434840"/>
+            <a:off x="1325880" y="4471416"/>
             <a:ext cx="10241280" cy="438912"/>
           </a:xfrm>
           <a:prstGeom prst="rect">
@@ -8829,8 +8829,8 @@
         </p:nvSpPr>
         <p:spPr>
           <a:xfrm>
-            <a:off x="411480" y="5010912"/>
-            <a:ext cx="11365992" cy="896112"/>
+            <a:off x="411480" y="5065776"/>
+            <a:ext cx="11365992" cy="932688"/>
           </a:xfrm>
           <a:prstGeom prst="roundRect">
             <a:avLst>
@@ -8877,8 +8877,8 @@
         </p:nvSpPr>
         <p:spPr>
           <a:xfrm>
-            <a:off x="411480" y="5010912"/>
-            <a:ext cx="68580" cy="896112"/>
+            <a:off x="411480" y="5065776"/>
+            <a:ext cx="68580" cy="932688"/>
           </a:xfrm>
           <a:prstGeom prst="rect">
             <a:avLst/>
@@ -8921,7 +8921,7 @@
         </p:nvSpPr>
         <p:spPr>
           <a:xfrm>
-            <a:off x="658368" y="5175504"/>
+            <a:off x="658368" y="5230368"/>
             <a:ext cx="438912" cy="438912"/>
           </a:xfrm>
           <a:prstGeom prst="ellipse">
@@ -8974,7 +8974,7 @@
         </p:nvSpPr>
         <p:spPr>
           <a:xfrm>
-            <a:off x="1325880" y="5120640"/>
+            <a:off x="1325880" y="5175504"/>
             <a:ext cx="10241280" cy="256032"/>
           </a:xfrm>
           <a:prstGeom prst="rect">
@@ -9016,7 +9016,7 @@
         </p:nvSpPr>
         <p:spPr>
           <a:xfrm>
-            <a:off x="1325880" y="5404104"/>
+            <a:off x="1325880" y="5458968"/>
             <a:ext cx="10241280" cy="438912"/>
           </a:xfrm>
           <a:prstGeom prst="rect">
@@ -11612,8 +11612,8 @@
         </p:nvSpPr>
         <p:spPr>
           <a:xfrm>
-            <a:off x="411480" y="1645920"/>
-            <a:ext cx="5577840" cy="2331720"/>
+            <a:off x="411480" y="1572768"/>
+            <a:ext cx="5577840" cy="2514600"/>
           </a:xfrm>
           <a:prstGeom prst="roundRect">
             <a:avLst>
@@ -11660,8 +11660,8 @@
         </p:nvSpPr>
         <p:spPr>
           <a:xfrm>
-            <a:off x="411480" y="1645920"/>
-            <a:ext cx="68580" cy="2331720"/>
+            <a:off x="411480" y="1572768"/>
+            <a:ext cx="68580" cy="2514600"/>
           </a:xfrm>
           <a:prstGeom prst="rect">
             <a:avLst/>
@@ -11704,7 +11704,7 @@
         </p:nvSpPr>
         <p:spPr>
           <a:xfrm>
-            <a:off x="612648" y="1773936"/>
+            <a:off x="612648" y="1700784"/>
             <a:ext cx="5212080" cy="274320"/>
           </a:xfrm>
           <a:prstGeom prst="rect">
@@ -11746,8 +11746,8 @@
         </p:nvSpPr>
         <p:spPr>
           <a:xfrm>
-            <a:off x="612648" y="2084832"/>
-            <a:ext cx="5212080" cy="1783080"/>
+            <a:off x="612648" y="2011680"/>
+            <a:ext cx="5212080" cy="1965960"/>
           </a:xfrm>
           <a:prstGeom prst="rect">
             <a:avLst/>
@@ -11903,8 +11903,8 @@
         </p:nvSpPr>
         <p:spPr>
           <a:xfrm>
-            <a:off x="6199632" y="1645920"/>
-            <a:ext cx="5577840" cy="2331720"/>
+            <a:off x="6199632" y="1572768"/>
+            <a:ext cx="5577840" cy="2514600"/>
           </a:xfrm>
           <a:prstGeom prst="roundRect">
             <a:avLst>
@@ -11951,8 +11951,8 @@
         </p:nvSpPr>
         <p:spPr>
           <a:xfrm>
-            <a:off x="6199632" y="1645920"/>
-            <a:ext cx="68580" cy="2331720"/>
+            <a:off x="6199632" y="1572768"/>
+            <a:ext cx="68580" cy="2514600"/>
           </a:xfrm>
           <a:prstGeom prst="rect">
             <a:avLst/>
@@ -11995,7 +11995,7 @@
         </p:nvSpPr>
         <p:spPr>
           <a:xfrm>
-            <a:off x="6400800" y="1773936"/>
+            <a:off x="6400800" y="1700784"/>
             <a:ext cx="5212080" cy="274320"/>
           </a:xfrm>
           <a:prstGeom prst="rect">
@@ -12037,8 +12037,8 @@
         </p:nvSpPr>
         <p:spPr>
           <a:xfrm>
-            <a:off x="6400800" y="2084832"/>
-            <a:ext cx="5212080" cy="1783080"/>
+            <a:off x="6400800" y="2011680"/>
+            <a:ext cx="5212080" cy="1965960"/>
           </a:xfrm>
           <a:prstGeom prst="rect">
             <a:avLst/>
@@ -12162,7 +12162,7 @@
                 </a:solidFill>
                 <a:latin typeface="Calibri"/>
               </a:rPr>
-              <a:t>Same engine, same rates, same safety checks as a</a:t>
+              <a:t>Same engine and the same rate book. The geometry</a:t>
             </a:r>
           </a:p>
           <a:p>
@@ -12181,7 +12181,7 @@
                 </a:solidFill>
                 <a:latin typeface="Calibri"/>
               </a:rPr>
-              <a:t>single part. Nothing about the maths changes.</a:t>
+              <a:t>checks have to be wired onto this route.</a:t>
             </a:r>
           </a:p>
         </p:txBody>
@@ -12355,7 +12355,7 @@
                 </a:solidFill>
                 <a:latin typeface="Calibri"/>
               </a:rPr>
-              <a:t>The agent marshals the run. It picks the part type, answers what it can from the drawing, and escalates what it cannot. Every number in the answer still comes from the same deterministic engine, at the same rates, with the same checks. The agent never sets a price. That rule does not bend for bulk.</a:t>
+              <a:t>The agent marshals the run. It picks the part type, answers what it can from the drawing, and escalates what it cannot. Every number still comes from the same deterministic engine at the same rates. The agent never sets a price, but it does choose the inputs, so the geometry checks that run on the CAD route today have to be wired onto this route before a run is left unattended.</a:t>
             </a:r>
           </a:p>
         </p:txBody>
@@ -13720,7 +13720,7 @@
                 </a:solidFill>
                 <a:latin typeface="Calibri"/>
               </a:rPr>
-              <a:t>182 values worked out per part</a:t>
+              <a:t>The part type’s own rules run</a:t>
             </a:r>
           </a:p>
         </p:txBody>
@@ -14597,7 +14597,7 @@
         </p:nvSpPr>
         <p:spPr>
           <a:xfrm>
-            <a:off x="411480" y="3931920"/>
+            <a:off x="411480" y="3886200"/>
             <a:ext cx="11338560" cy="274320"/>
           </a:xfrm>
           <a:prstGeom prst="rect">
@@ -14626,7 +14626,7 @@
                 </a:solidFill>
                 <a:latin typeface="Calibri"/>
               </a:rPr>
-              <a:t>How long a run takes, measured on our own parts this month</a:t>
+              <a:t>How long a run takes. The 40-part row was measured this month; the rest carries that rate forward</a:t>
             </a:r>
           </a:p>
         </p:txBody>
@@ -14639,7 +14639,7 @@
         </p:nvSpPr>
         <p:spPr>
           <a:xfrm>
-            <a:off x="411480" y="4206240"/>
+            <a:off x="411480" y="4133087"/>
             <a:ext cx="3931920" cy="329184"/>
           </a:xfrm>
           <a:prstGeom prst="rect">
@@ -14683,7 +14683,7 @@
         </p:nvSpPr>
         <p:spPr>
           <a:xfrm>
-            <a:off x="493776" y="4288536"/>
+            <a:off x="493776" y="4215383"/>
             <a:ext cx="3785616" cy="219456"/>
           </a:xfrm>
           <a:prstGeom prst="rect">
@@ -14725,7 +14725,7 @@
         </p:nvSpPr>
         <p:spPr>
           <a:xfrm>
-            <a:off x="4343400" y="4206240"/>
+            <a:off x="4343400" y="4133087"/>
             <a:ext cx="2377440" cy="329184"/>
           </a:xfrm>
           <a:prstGeom prst="rect">
@@ -14769,7 +14769,7 @@
         </p:nvSpPr>
         <p:spPr>
           <a:xfrm>
-            <a:off x="4425696" y="4288536"/>
+            <a:off x="4425696" y="4215383"/>
             <a:ext cx="2231136" cy="219456"/>
           </a:xfrm>
           <a:prstGeom prst="rect">
@@ -14811,7 +14811,7 @@
         </p:nvSpPr>
         <p:spPr>
           <a:xfrm>
-            <a:off x="6720840" y="4206240"/>
+            <a:off x="6720840" y="4133087"/>
             <a:ext cx="5056632" cy="329184"/>
           </a:xfrm>
           <a:prstGeom prst="rect">
@@ -14855,7 +14855,7 @@
         </p:nvSpPr>
         <p:spPr>
           <a:xfrm>
-            <a:off x="6803136" y="4288536"/>
+            <a:off x="6803136" y="4215383"/>
             <a:ext cx="4910328" cy="219456"/>
           </a:xfrm>
           <a:prstGeom prst="rect">
@@ -14897,8 +14897,8 @@
         </p:nvSpPr>
         <p:spPr>
           <a:xfrm>
-            <a:off x="411480" y="4535424"/>
-            <a:ext cx="3931920" cy="292608"/>
+            <a:off x="411480" y="4462271"/>
+            <a:ext cx="3931920" cy="274320"/>
           </a:xfrm>
           <a:prstGeom prst="rect">
             <a:avLst/>
@@ -14943,8 +14943,8 @@
         </p:nvSpPr>
         <p:spPr>
           <a:xfrm>
-            <a:off x="493776" y="4599432"/>
-            <a:ext cx="3785616" cy="201168"/>
+            <a:off x="493776" y="4526279"/>
+            <a:ext cx="3785616" cy="182880"/>
           </a:xfrm>
           <a:prstGeom prst="rect">
             <a:avLst/>
@@ -14985,8 +14985,8 @@
         </p:nvSpPr>
         <p:spPr>
           <a:xfrm>
-            <a:off x="4343400" y="4535424"/>
-            <a:ext cx="2377440" cy="292608"/>
+            <a:off x="4343400" y="4462271"/>
+            <a:ext cx="2377440" cy="274320"/>
           </a:xfrm>
           <a:prstGeom prst="rect">
             <a:avLst/>
@@ -15031,8 +15031,8 @@
         </p:nvSpPr>
         <p:spPr>
           <a:xfrm>
-            <a:off x="4425696" y="4599432"/>
-            <a:ext cx="2231136" cy="201168"/>
+            <a:off x="4425696" y="4526279"/>
+            <a:ext cx="2231136" cy="182880"/>
           </a:xfrm>
           <a:prstGeom prst="rect">
             <a:avLst/>
@@ -15060,7 +15060,7 @@
                 </a:solidFill>
                 <a:latin typeface="Calibri"/>
               </a:rPr>
-              <a:t>1.2 seconds</a:t>
+              <a:t>0.9 to 3.1 seconds</a:t>
             </a:r>
           </a:p>
         </p:txBody>
@@ -15073,8 +15073,8 @@
         </p:nvSpPr>
         <p:spPr>
           <a:xfrm>
-            <a:off x="6720840" y="4535424"/>
-            <a:ext cx="5056632" cy="292608"/>
+            <a:off x="6720840" y="4462271"/>
+            <a:ext cx="5056632" cy="274320"/>
           </a:xfrm>
           <a:prstGeom prst="rect">
             <a:avLst/>
@@ -15119,8 +15119,8 @@
         </p:nvSpPr>
         <p:spPr>
           <a:xfrm>
-            <a:off x="6803136" y="4599432"/>
-            <a:ext cx="4910328" cy="201168"/>
+            <a:off x="6803136" y="4526279"/>
+            <a:ext cx="4910328" cy="182880"/>
           </a:xfrm>
           <a:prstGeom prst="rect">
             <a:avLst/>
@@ -15148,7 +15148,7 @@
                 </a:solidFill>
                 <a:latin typeface="Calibri"/>
               </a:rPr>
-              <a:t>Average over eight real parts, 0.6 MB to 20 MB</a:t>
+              <a:t>Five real production parts, 0.6 MB to 3.0 MB. Bigger file, longer</a:t>
             </a:r>
           </a:p>
         </p:txBody>
@@ -15161,8 +15161,8 @@
         </p:nvSpPr>
         <p:spPr>
           <a:xfrm>
-            <a:off x="411480" y="4828032"/>
-            <a:ext cx="3931920" cy="292608"/>
+            <a:off x="411480" y="4736591"/>
+            <a:ext cx="3931920" cy="274320"/>
           </a:xfrm>
           <a:prstGeom prst="rect">
             <a:avLst/>
@@ -15207,8 +15207,8 @@
         </p:nvSpPr>
         <p:spPr>
           <a:xfrm>
-            <a:off x="493776" y="4892040"/>
-            <a:ext cx="3785616" cy="201168"/>
+            <a:off x="493776" y="4800599"/>
+            <a:ext cx="3785616" cy="182880"/>
           </a:xfrm>
           <a:prstGeom prst="rect">
             <a:avLst/>
@@ -15236,7 +15236,7 @@
                 </a:solidFill>
                 <a:latin typeface="Calibri"/>
               </a:rPr>
-              <a:t>Work out the 182 values and cost it</a:t>
+              <a:t>Run the rules and cost it</a:t>
             </a:r>
           </a:p>
         </p:txBody>
@@ -15249,8 +15249,8 @@
         </p:nvSpPr>
         <p:spPr>
           <a:xfrm>
-            <a:off x="4343400" y="4828032"/>
-            <a:ext cx="2377440" cy="292608"/>
+            <a:off x="4343400" y="4736591"/>
+            <a:ext cx="2377440" cy="274320"/>
           </a:xfrm>
           <a:prstGeom prst="rect">
             <a:avLst/>
@@ -15295,8 +15295,8 @@
         </p:nvSpPr>
         <p:spPr>
           <a:xfrm>
-            <a:off x="4425696" y="4892040"/>
-            <a:ext cx="2231136" cy="201168"/>
+            <a:off x="4425696" y="4800599"/>
+            <a:ext cx="2231136" cy="182880"/>
           </a:xfrm>
           <a:prstGeom prst="rect">
             <a:avLst/>
@@ -15337,8 +15337,8 @@
         </p:nvSpPr>
         <p:spPr>
           <a:xfrm>
-            <a:off x="6720840" y="4828032"/>
-            <a:ext cx="5056632" cy="292608"/>
+            <a:off x="6720840" y="4736591"/>
+            <a:ext cx="5056632" cy="274320"/>
           </a:xfrm>
           <a:prstGeom prst="rect">
             <a:avLst/>
@@ -15383,8 +15383,8 @@
         </p:nvSpPr>
         <p:spPr>
           <a:xfrm>
-            <a:off x="6803136" y="4892040"/>
-            <a:ext cx="4910328" cy="201168"/>
+            <a:off x="6803136" y="4800599"/>
+            <a:ext cx="4910328" cy="182880"/>
           </a:xfrm>
           <a:prstGeom prst="rect">
             <a:avLst/>
@@ -15425,8 +15425,8 @@
         </p:nvSpPr>
         <p:spPr>
           <a:xfrm>
-            <a:off x="411480" y="5120640"/>
-            <a:ext cx="3931920" cy="292608"/>
+            <a:off x="411480" y="5010911"/>
+            <a:ext cx="3931920" cy="274320"/>
           </a:xfrm>
           <a:prstGeom prst="rect">
             <a:avLst/>
@@ -15471,8 +15471,8 @@
         </p:nvSpPr>
         <p:spPr>
           <a:xfrm>
-            <a:off x="493776" y="5184648"/>
-            <a:ext cx="3785616" cy="201168"/>
+            <a:off x="493776" y="5074919"/>
+            <a:ext cx="3785616" cy="182880"/>
           </a:xfrm>
           <a:prstGeom prst="rect">
             <a:avLst/>
@@ -15500,7 +15500,7 @@
                 </a:solidFill>
                 <a:latin typeface="Calibri"/>
               </a:rPr>
-              <a:t>100 parts</a:t>
+              <a:t>40 parts</a:t>
             </a:r>
           </a:p>
         </p:txBody>
@@ -15513,8 +15513,8 @@
         </p:nvSpPr>
         <p:spPr>
           <a:xfrm>
-            <a:off x="4343400" y="5120640"/>
-            <a:ext cx="2377440" cy="292608"/>
+            <a:off x="4343400" y="5010911"/>
+            <a:ext cx="2377440" cy="274320"/>
           </a:xfrm>
           <a:prstGeom prst="rect">
             <a:avLst/>
@@ -15559,8 +15559,8 @@
         </p:nvSpPr>
         <p:spPr>
           <a:xfrm>
-            <a:off x="4425696" y="5184648"/>
-            <a:ext cx="2231136" cy="201168"/>
+            <a:off x="4425696" y="5074919"/>
+            <a:ext cx="2231136" cy="182880"/>
           </a:xfrm>
           <a:prstGeom prst="rect">
             <a:avLst/>
@@ -15588,7 +15588,7 @@
                 </a:solidFill>
                 <a:latin typeface="Calibri"/>
               </a:rPr>
-              <a:t>1 minute</a:t>
+              <a:t>31 seconds</a:t>
             </a:r>
           </a:p>
         </p:txBody>
@@ -15601,8 +15601,8 @@
         </p:nvSpPr>
         <p:spPr>
           <a:xfrm>
-            <a:off x="6720840" y="5120640"/>
-            <a:ext cx="5056632" cy="292608"/>
+            <a:off x="6720840" y="5010911"/>
+            <a:ext cx="5056632" cy="274320"/>
           </a:xfrm>
           <a:prstGeom prst="rect">
             <a:avLst/>
@@ -15647,8 +15647,8 @@
         </p:nvSpPr>
         <p:spPr>
           <a:xfrm>
-            <a:off x="6803136" y="5184648"/>
-            <a:ext cx="4910328" cy="201168"/>
+            <a:off x="6803136" y="5074919"/>
+            <a:ext cx="4910328" cy="182880"/>
           </a:xfrm>
           <a:prstGeom prst="rect">
             <a:avLst/>
@@ -15676,7 +15676,7 @@
                 </a:solidFill>
                 <a:latin typeface="Calibri"/>
               </a:rPr>
-              <a:t>On two measuring workers, unattended</a:t>
+              <a:t>Measured. Two workers, nothing reused from cache</a:t>
             </a:r>
           </a:p>
         </p:txBody>
@@ -15689,8 +15689,8 @@
         </p:nvSpPr>
         <p:spPr>
           <a:xfrm>
-            <a:off x="411480" y="5413248"/>
-            <a:ext cx="3931920" cy="292608"/>
+            <a:off x="411480" y="5285231"/>
+            <a:ext cx="3931920" cy="274320"/>
           </a:xfrm>
           <a:prstGeom prst="rect">
             <a:avLst/>
@@ -15735,8 +15735,8 @@
         </p:nvSpPr>
         <p:spPr>
           <a:xfrm>
-            <a:off x="493776" y="5477256"/>
-            <a:ext cx="3785616" cy="201168"/>
+            <a:off x="493776" y="5349239"/>
+            <a:ext cx="3785616" cy="182880"/>
           </a:xfrm>
           <a:prstGeom prst="rect">
             <a:avLst/>
@@ -15764,7 +15764,7 @@
                 </a:solidFill>
                 <a:latin typeface="Calibri"/>
               </a:rPr>
-              <a:t>500 parts</a:t>
+              <a:t>100 parts</a:t>
             </a:r>
           </a:p>
         </p:txBody>
@@ -15777,8 +15777,8 @@
         </p:nvSpPr>
         <p:spPr>
           <a:xfrm>
-            <a:off x="4343400" y="5413248"/>
-            <a:ext cx="2377440" cy="292608"/>
+            <a:off x="4343400" y="5285231"/>
+            <a:ext cx="2377440" cy="274320"/>
           </a:xfrm>
           <a:prstGeom prst="rect">
             <a:avLst/>
@@ -15823,8 +15823,8 @@
         </p:nvSpPr>
         <p:spPr>
           <a:xfrm>
-            <a:off x="4425696" y="5477256"/>
-            <a:ext cx="2231136" cy="201168"/>
+            <a:off x="4425696" y="5349239"/>
+            <a:ext cx="2231136" cy="182880"/>
           </a:xfrm>
           <a:prstGeom prst="rect">
             <a:avLst/>
@@ -15852,7 +15852,7 @@
                 </a:solidFill>
                 <a:latin typeface="Calibri"/>
               </a:rPr>
-              <a:t>5 minutes</a:t>
+              <a:t>about 1.5 minutes</a:t>
             </a:r>
           </a:p>
         </p:txBody>
@@ -15865,8 +15865,8 @@
         </p:nvSpPr>
         <p:spPr>
           <a:xfrm>
-            <a:off x="6720840" y="5413248"/>
-            <a:ext cx="5056632" cy="292608"/>
+            <a:off x="6720840" y="5285231"/>
+            <a:ext cx="5056632" cy="274320"/>
           </a:xfrm>
           <a:prstGeom prst="rect">
             <a:avLst/>
@@ -15911,8 +15911,8 @@
         </p:nvSpPr>
         <p:spPr>
           <a:xfrm>
-            <a:off x="6803136" y="5477256"/>
-            <a:ext cx="4910328" cy="201168"/>
+            <a:off x="6803136" y="5349239"/>
+            <a:ext cx="4910328" cy="182880"/>
           </a:xfrm>
           <a:prstGeom prst="rect">
             <a:avLst/>
@@ -15940,7 +15940,7 @@
                 </a:solidFill>
                 <a:latin typeface="Calibri"/>
               </a:rPr>
-              <a:t>On two workers. Two and a half on four</a:t>
+              <a:t>That measured rate, on two workers</a:t>
             </a:r>
           </a:p>
         </p:txBody>
@@ -15953,8 +15953,8 @@
         </p:nvSpPr>
         <p:spPr>
           <a:xfrm>
-            <a:off x="411480" y="5705856"/>
-            <a:ext cx="3931920" cy="292608"/>
+            <a:off x="411480" y="5559551"/>
+            <a:ext cx="3931920" cy="274320"/>
           </a:xfrm>
           <a:prstGeom prst="rect">
             <a:avLst/>
@@ -15999,8 +15999,8 @@
         </p:nvSpPr>
         <p:spPr>
           <a:xfrm>
-            <a:off x="493776" y="5769864"/>
-            <a:ext cx="3785616" cy="201168"/>
+            <a:off x="493776" y="5623559"/>
+            <a:ext cx="3785616" cy="182880"/>
           </a:xfrm>
           <a:prstGeom prst="rect">
             <a:avLst/>
@@ -16028,7 +16028,7 @@
                 </a:solidFill>
                 <a:latin typeface="Calibri"/>
               </a:rPr>
-              <a:t>1,000 parts</a:t>
+              <a:t>500 parts</a:t>
             </a:r>
           </a:p>
         </p:txBody>
@@ -16041,8 +16041,8 @@
         </p:nvSpPr>
         <p:spPr>
           <a:xfrm>
-            <a:off x="4343400" y="5705856"/>
-            <a:ext cx="2377440" cy="292608"/>
+            <a:off x="4343400" y="5559551"/>
+            <a:ext cx="2377440" cy="274320"/>
           </a:xfrm>
           <a:prstGeom prst="rect">
             <a:avLst/>
@@ -16087,8 +16087,8 @@
         </p:nvSpPr>
         <p:spPr>
           <a:xfrm>
-            <a:off x="4425696" y="5769864"/>
-            <a:ext cx="2231136" cy="201168"/>
+            <a:off x="4425696" y="5623559"/>
+            <a:ext cx="2231136" cy="182880"/>
           </a:xfrm>
           <a:prstGeom prst="rect">
             <a:avLst/>
@@ -16116,7 +16116,7 @@
                 </a:solidFill>
                 <a:latin typeface="Calibri"/>
               </a:rPr>
-              <a:t>10 minutes</a:t>
+              <a:t>about 6.5 minutes</a:t>
             </a:r>
           </a:p>
         </p:txBody>
@@ -16129,8 +16129,8 @@
         </p:nvSpPr>
         <p:spPr>
           <a:xfrm>
-            <a:off x="6720840" y="5705856"/>
-            <a:ext cx="5056632" cy="292608"/>
+            <a:off x="6720840" y="5559551"/>
+            <a:ext cx="5056632" cy="274320"/>
           </a:xfrm>
           <a:prstGeom prst="rect">
             <a:avLst/>
@@ -16175,8 +16175,8 @@
         </p:nvSpPr>
         <p:spPr>
           <a:xfrm>
-            <a:off x="6803136" y="5769864"/>
-            <a:ext cx="4910328" cy="201168"/>
+            <a:off x="6803136" y="5623559"/>
+            <a:ext cx="4910328" cy="182880"/>
           </a:xfrm>
           <a:prstGeom prst="rect">
             <a:avLst/>
@@ -16204,32 +16204,32 @@
                 </a:solidFill>
                 <a:latin typeface="Calibri"/>
               </a:rPr>
-              <a:t>On two workers. Five on four</a:t>
-            </a:r>
-          </a:p>
-        </p:txBody>
-      </p:sp>
-      <p:sp>
-        <p:nvSpPr>
-          <p:cNvPr id="88" name="Rounded Rectangle 87"/>
+              <a:t>Two workers. Roughly half that on four</a:t>
+            </a:r>
+          </a:p>
+        </p:txBody>
+      </p:sp>
+      <p:sp>
+        <p:nvSpPr>
+          <p:cNvPr id="88" name="Rectangle 87"/>
           <p:cNvSpPr/>
           <p:nvPr/>
         </p:nvSpPr>
         <p:spPr>
           <a:xfrm>
-            <a:off x="411480" y="6144768"/>
-            <a:ext cx="11365992" cy="621792"/>
-          </a:xfrm>
-          <a:prstGeom prst="roundRect">
-            <a:avLst>
-              <a:gd name="adj" fmla="val 12000"/>
-            </a:avLst>
-          </a:prstGeom>
-          <a:solidFill>
-            <a:srgbClr val="E8F1FA"/>
-          </a:solidFill>
-          <a:ln>
-            <a:noFill/>
+            <a:off x="411480" y="5833871"/>
+            <a:ext cx="3931920" cy="274320"/>
+          </a:xfrm>
+          <a:prstGeom prst="rect">
+            <a:avLst/>
+          </a:prstGeom>
+          <a:solidFill>
+            <a:srgbClr val="F4F7FB"/>
+          </a:solidFill>
+          <a:ln w="9525">
+            <a:solidFill>
+              <a:srgbClr val="DCE3EE"/>
+            </a:solidFill>
           </a:ln>
           <a:effectLst/>
         </p:spPr>
@@ -16257,23 +16257,67 @@
       </p:sp>
       <p:sp>
         <p:nvSpPr>
-          <p:cNvPr id="89" name="Rectangle 88"/>
+          <p:cNvPr id="89" name="TextBox 88"/>
+          <p:cNvSpPr txBox="1"/>
+          <p:nvPr/>
+        </p:nvSpPr>
+        <p:spPr>
+          <a:xfrm>
+            <a:off x="493776" y="5897879"/>
+            <a:ext cx="3785616" cy="182880"/>
+          </a:xfrm>
+          <a:prstGeom prst="rect">
+            <a:avLst/>
+          </a:prstGeom>
+          <a:noFill/>
+        </p:spPr>
+        <p:txBody>
+          <a:bodyPr wrap="square" anchor="t" lIns="0" rIns="0" tIns="0" bIns="0">
+            <a:spAutoFit/>
+          </a:bodyPr>
+          <a:lstStyle/>
+          <a:p>
+            <a:pPr algn="l">
+              <a:lnSpc>
+                <a:spcPct val="100000"/>
+              </a:lnSpc>
+              <a:spcAft>
+                <a:spcPts val="400"/>
+              </a:spcAft>
+            </a:pPr>
+            <a:r>
+              <a:rPr sz="1019" b="0" i="0">
+                <a:solidFill>
+                  <a:srgbClr val="3A4356"/>
+                </a:solidFill>
+                <a:latin typeface="Calibri"/>
+              </a:rPr>
+              <a:t>1,000 parts</a:t>
+            </a:r>
+          </a:p>
+        </p:txBody>
+      </p:sp>
+      <p:sp>
+        <p:nvSpPr>
+          <p:cNvPr id="90" name="Rectangle 89"/>
           <p:cNvSpPr/>
           <p:nvPr/>
         </p:nvSpPr>
         <p:spPr>
           <a:xfrm>
-            <a:off x="411480" y="6144768"/>
-            <a:ext cx="68580" cy="621792"/>
-          </a:xfrm>
-          <a:prstGeom prst="rect">
-            <a:avLst/>
-          </a:prstGeom>
-          <a:solidFill>
-            <a:srgbClr val="1D6FB8"/>
-          </a:solidFill>
-          <a:ln>
-            <a:noFill/>
+            <a:off x="4343400" y="5833871"/>
+            <a:ext cx="2377440" cy="274320"/>
+          </a:xfrm>
+          <a:prstGeom prst="rect">
+            <a:avLst/>
+          </a:prstGeom>
+          <a:solidFill>
+            <a:srgbClr val="F4F7FB"/>
+          </a:solidFill>
+          <a:ln w="9525">
+            <a:solidFill>
+              <a:srgbClr val="DCE3EE"/>
+            </a:solidFill>
           </a:ln>
           <a:effectLst/>
         </p:spPr>
@@ -16301,14 +16345,14 @@
       </p:sp>
       <p:sp>
         <p:nvSpPr>
-          <p:cNvPr id="90" name="TextBox 89"/>
+          <p:cNvPr id="91" name="TextBox 90"/>
           <p:cNvSpPr txBox="1"/>
           <p:nvPr/>
         </p:nvSpPr>
         <p:spPr>
           <a:xfrm>
-            <a:off x="630936" y="6263640"/>
-            <a:ext cx="10954512" cy="256032"/>
+            <a:off x="4425696" y="5897879"/>
+            <a:ext cx="2231136" cy="182880"/>
           </a:xfrm>
           <a:prstGeom prst="rect">
             <a:avLst/>
@@ -16330,6 +16374,226 @@
               </a:spcAft>
             </a:pPr>
             <a:r>
+              <a:rPr sz="1019" b="1" i="0">
+                <a:solidFill>
+                  <a:srgbClr val="16325C"/>
+                </a:solidFill>
+                <a:latin typeface="Calibri"/>
+              </a:rPr>
+              <a:t>about 13 minutes</a:t>
+            </a:r>
+          </a:p>
+        </p:txBody>
+      </p:sp>
+      <p:sp>
+        <p:nvSpPr>
+          <p:cNvPr id="92" name="Rectangle 91"/>
+          <p:cNvSpPr/>
+          <p:nvPr/>
+        </p:nvSpPr>
+        <p:spPr>
+          <a:xfrm>
+            <a:off x="6720840" y="5833871"/>
+            <a:ext cx="5056632" cy="274320"/>
+          </a:xfrm>
+          <a:prstGeom prst="rect">
+            <a:avLst/>
+          </a:prstGeom>
+          <a:solidFill>
+            <a:srgbClr val="F4F7FB"/>
+          </a:solidFill>
+          <a:ln w="9525">
+            <a:solidFill>
+              <a:srgbClr val="DCE3EE"/>
+            </a:solidFill>
+          </a:ln>
+          <a:effectLst/>
+        </p:spPr>
+        <p:style>
+          <a:lnRef idx="1">
+            <a:schemeClr val="accent1"/>
+          </a:lnRef>
+          <a:fillRef idx="3">
+            <a:schemeClr val="accent1"/>
+          </a:fillRef>
+          <a:effectRef idx="2">
+            <a:schemeClr val="accent1"/>
+          </a:effectRef>
+          <a:fontRef idx="minor">
+            <a:schemeClr val="lt1"/>
+          </a:fontRef>
+        </p:style>
+        <p:txBody>
+          <a:bodyPr rtlCol="0" anchor="ctr"/>
+          <a:lstStyle/>
+          <a:p>
+            <a:pPr algn="ctr"/>
+          </a:p>
+        </p:txBody>
+      </p:sp>
+      <p:sp>
+        <p:nvSpPr>
+          <p:cNvPr id="93" name="TextBox 92"/>
+          <p:cNvSpPr txBox="1"/>
+          <p:nvPr/>
+        </p:nvSpPr>
+        <p:spPr>
+          <a:xfrm>
+            <a:off x="6803136" y="5897879"/>
+            <a:ext cx="4910328" cy="182880"/>
+          </a:xfrm>
+          <a:prstGeom prst="rect">
+            <a:avLst/>
+          </a:prstGeom>
+          <a:noFill/>
+        </p:spPr>
+        <p:txBody>
+          <a:bodyPr wrap="square" anchor="t" lIns="0" rIns="0" tIns="0" bIns="0">
+            <a:spAutoFit/>
+          </a:bodyPr>
+          <a:lstStyle/>
+          <a:p>
+            <a:pPr algn="l">
+              <a:lnSpc>
+                <a:spcPct val="100000"/>
+              </a:lnSpc>
+              <a:spcAft>
+                <a:spcPts val="400"/>
+              </a:spcAft>
+            </a:pPr>
+            <a:r>
+              <a:rPr sz="1019" b="0" i="0">
+                <a:solidFill>
+                  <a:srgbClr val="3A4356"/>
+                </a:solidFill>
+                <a:latin typeface="Calibri"/>
+              </a:rPr>
+              <a:t>Two workers. Roughly half that on four</a:t>
+            </a:r>
+          </a:p>
+        </p:txBody>
+      </p:sp>
+      <p:sp>
+        <p:nvSpPr>
+          <p:cNvPr id="94" name="Rounded Rectangle 93"/>
+          <p:cNvSpPr/>
+          <p:nvPr/>
+        </p:nvSpPr>
+        <p:spPr>
+          <a:xfrm>
+            <a:off x="411480" y="6144768"/>
+            <a:ext cx="11365992" cy="603504"/>
+          </a:xfrm>
+          <a:prstGeom prst="roundRect">
+            <a:avLst>
+              <a:gd name="adj" fmla="val 12000"/>
+            </a:avLst>
+          </a:prstGeom>
+          <a:solidFill>
+            <a:srgbClr val="E8F1FA"/>
+          </a:solidFill>
+          <a:ln>
+            <a:noFill/>
+          </a:ln>
+          <a:effectLst/>
+        </p:spPr>
+        <p:style>
+          <a:lnRef idx="1">
+            <a:schemeClr val="accent1"/>
+          </a:lnRef>
+          <a:fillRef idx="3">
+            <a:schemeClr val="accent1"/>
+          </a:fillRef>
+          <a:effectRef idx="2">
+            <a:schemeClr val="accent1"/>
+          </a:effectRef>
+          <a:fontRef idx="minor">
+            <a:schemeClr val="lt1"/>
+          </a:fontRef>
+        </p:style>
+        <p:txBody>
+          <a:bodyPr rtlCol="0" anchor="ctr"/>
+          <a:lstStyle/>
+          <a:p>
+            <a:pPr algn="ctr"/>
+          </a:p>
+        </p:txBody>
+      </p:sp>
+      <p:sp>
+        <p:nvSpPr>
+          <p:cNvPr id="95" name="Rectangle 94"/>
+          <p:cNvSpPr/>
+          <p:nvPr/>
+        </p:nvSpPr>
+        <p:spPr>
+          <a:xfrm>
+            <a:off x="411480" y="6144768"/>
+            <a:ext cx="68580" cy="603504"/>
+          </a:xfrm>
+          <a:prstGeom prst="rect">
+            <a:avLst/>
+          </a:prstGeom>
+          <a:solidFill>
+            <a:srgbClr val="1D6FB8"/>
+          </a:solidFill>
+          <a:ln>
+            <a:noFill/>
+          </a:ln>
+          <a:effectLst/>
+        </p:spPr>
+        <p:style>
+          <a:lnRef idx="1">
+            <a:schemeClr val="accent1"/>
+          </a:lnRef>
+          <a:fillRef idx="3">
+            <a:schemeClr val="accent1"/>
+          </a:fillRef>
+          <a:effectRef idx="2">
+            <a:schemeClr val="accent1"/>
+          </a:effectRef>
+          <a:fontRef idx="minor">
+            <a:schemeClr val="lt1"/>
+          </a:fontRef>
+        </p:style>
+        <p:txBody>
+          <a:bodyPr rtlCol="0" anchor="ctr"/>
+          <a:lstStyle/>
+          <a:p>
+            <a:pPr algn="ctr"/>
+          </a:p>
+        </p:txBody>
+      </p:sp>
+      <p:sp>
+        <p:nvSpPr>
+          <p:cNvPr id="96" name="TextBox 95"/>
+          <p:cNvSpPr txBox="1"/>
+          <p:nvPr/>
+        </p:nvSpPr>
+        <p:spPr>
+          <a:xfrm>
+            <a:off x="630936" y="6263640"/>
+            <a:ext cx="10954512" cy="256032"/>
+          </a:xfrm>
+          <a:prstGeom prst="rect">
+            <a:avLst/>
+          </a:prstGeom>
+          <a:noFill/>
+        </p:spPr>
+        <p:txBody>
+          <a:bodyPr wrap="square" anchor="t" lIns="0" rIns="0" tIns="0" bIns="0">
+            <a:spAutoFit/>
+          </a:bodyPr>
+          <a:lstStyle/>
+          <a:p>
+            <a:pPr algn="l">
+              <a:lnSpc>
+                <a:spcPct val="100000"/>
+              </a:lnSpc>
+              <a:spcAft>
+                <a:spcPts val="400"/>
+              </a:spcAft>
+            </a:pPr>
+            <a:r>
               <a:rPr sz="1200" b="1" i="0">
                 <a:solidFill>
                   <a:srgbClr val="1D6FB8"/>
@@ -16343,14 +16607,14 @@
       </p:sp>
       <p:sp>
         <p:nvSpPr>
-          <p:cNvPr id="91" name="TextBox 90"/>
+          <p:cNvPr id="97" name="TextBox 96"/>
           <p:cNvSpPr txBox="1"/>
           <p:nvPr/>
         </p:nvSpPr>
         <p:spPr>
           <a:xfrm>
             <a:off x="630936" y="6547104"/>
-            <a:ext cx="10954512" cy="118872"/>
+            <a:ext cx="10954512" cy="109728"/>
           </a:xfrm>
           <a:prstGeom prst="rect">
             <a:avLst/>
@@ -16762,7 +17026,7 @@
         </p:nvSpPr>
         <p:spPr>
           <a:xfrm>
-            <a:off x="411480" y="2011680"/>
+            <a:off x="411480" y="1965960"/>
             <a:ext cx="2743200" cy="329184"/>
           </a:xfrm>
           <a:prstGeom prst="rect">
@@ -16806,7 +17070,7 @@
         </p:nvSpPr>
         <p:spPr>
           <a:xfrm>
-            <a:off x="493776" y="2093976"/>
+            <a:off x="493776" y="2048256"/>
             <a:ext cx="2596896" cy="219456"/>
           </a:xfrm>
           <a:prstGeom prst="rect">
@@ -16848,7 +17112,7 @@
         </p:nvSpPr>
         <p:spPr>
           <a:xfrm>
-            <a:off x="3154680" y="2011680"/>
+            <a:off x="3154680" y="1965960"/>
             <a:ext cx="1371600" cy="329184"/>
           </a:xfrm>
           <a:prstGeom prst="rect">
@@ -16892,7 +17156,7 @@
         </p:nvSpPr>
         <p:spPr>
           <a:xfrm>
-            <a:off x="3236976" y="2093976"/>
+            <a:off x="3236976" y="2048256"/>
             <a:ext cx="1225296" cy="219456"/>
           </a:xfrm>
           <a:prstGeom prst="rect">
@@ -16934,7 +17198,7 @@
         </p:nvSpPr>
         <p:spPr>
           <a:xfrm>
-            <a:off x="4526280" y="2011680"/>
+            <a:off x="4526280" y="1965960"/>
             <a:ext cx="6062472" cy="329184"/>
           </a:xfrm>
           <a:prstGeom prst="rect">
@@ -16978,7 +17242,7 @@
         </p:nvSpPr>
         <p:spPr>
           <a:xfrm>
-            <a:off x="4608576" y="2093976"/>
+            <a:off x="4608576" y="2048256"/>
             <a:ext cx="5916168" cy="219456"/>
           </a:xfrm>
           <a:prstGeom prst="rect">
@@ -17020,7 +17284,7 @@
         </p:nvSpPr>
         <p:spPr>
           <a:xfrm>
-            <a:off x="10588752" y="2011680"/>
+            <a:off x="10588752" y="1965960"/>
             <a:ext cx="1188720" cy="329184"/>
           </a:xfrm>
           <a:prstGeom prst="rect">
@@ -17064,7 +17328,7 @@
         </p:nvSpPr>
         <p:spPr>
           <a:xfrm>
-            <a:off x="10671048" y="2093976"/>
+            <a:off x="10671048" y="2048256"/>
             <a:ext cx="1042416" cy="219456"/>
           </a:xfrm>
           <a:prstGeom prst="rect">
@@ -17106,8 +17370,8 @@
         </p:nvSpPr>
         <p:spPr>
           <a:xfrm>
-            <a:off x="411480" y="2340864"/>
-            <a:ext cx="2743200" cy="713232"/>
+            <a:off x="411480" y="2295144"/>
+            <a:ext cx="2743200" cy="640080"/>
           </a:xfrm>
           <a:prstGeom prst="rect">
             <a:avLst/>
@@ -17152,8 +17416,8 @@
         </p:nvSpPr>
         <p:spPr>
           <a:xfrm>
-            <a:off x="493776" y="2404872"/>
-            <a:ext cx="2596896" cy="621792"/>
+            <a:off x="493776" y="2359152"/>
+            <a:ext cx="2596896" cy="548640"/>
           </a:xfrm>
           <a:prstGeom prst="rect">
             <a:avLst/>
@@ -17194,8 +17458,8 @@
         </p:nvSpPr>
         <p:spPr>
           <a:xfrm>
-            <a:off x="3154680" y="2340864"/>
-            <a:ext cx="1371600" cy="713232"/>
+            <a:off x="3154680" y="2295144"/>
+            <a:ext cx="1371600" cy="640080"/>
           </a:xfrm>
           <a:prstGeom prst="rect">
             <a:avLst/>
@@ -17240,8 +17504,8 @@
         </p:nvSpPr>
         <p:spPr>
           <a:xfrm>
-            <a:off x="3236976" y="2404872"/>
-            <a:ext cx="1225296" cy="621792"/>
+            <a:off x="3236976" y="2359152"/>
+            <a:ext cx="1225296" cy="548640"/>
           </a:xfrm>
           <a:prstGeom prst="rect">
             <a:avLst/>
@@ -17282,8 +17546,8 @@
         </p:nvSpPr>
         <p:spPr>
           <a:xfrm>
-            <a:off x="4526280" y="2340864"/>
-            <a:ext cx="6062472" cy="713232"/>
+            <a:off x="4526280" y="2295144"/>
+            <a:ext cx="6062472" cy="640080"/>
           </a:xfrm>
           <a:prstGeom prst="rect">
             <a:avLst/>
@@ -17328,8 +17592,8 @@
         </p:nvSpPr>
         <p:spPr>
           <a:xfrm>
-            <a:off x="4608576" y="2404872"/>
-            <a:ext cx="5916168" cy="621792"/>
+            <a:off x="4608576" y="2359152"/>
+            <a:ext cx="5916168" cy="548640"/>
           </a:xfrm>
           <a:prstGeom prst="rect">
             <a:avLst/>
@@ -17370,8 +17634,8 @@
         </p:nvSpPr>
         <p:spPr>
           <a:xfrm>
-            <a:off x="10588752" y="2340864"/>
-            <a:ext cx="1188720" cy="713232"/>
+            <a:off x="10588752" y="2295144"/>
+            <a:ext cx="1188720" cy="640080"/>
           </a:xfrm>
           <a:prstGeom prst="rect">
             <a:avLst/>
@@ -17416,8 +17680,8 @@
         </p:nvSpPr>
         <p:spPr>
           <a:xfrm>
-            <a:off x="10671048" y="2404872"/>
-            <a:ext cx="1042416" cy="621792"/>
+            <a:off x="10671048" y="2359152"/>
+            <a:ext cx="1042416" cy="548640"/>
           </a:xfrm>
           <a:prstGeom prst="rect">
             <a:avLst/>
@@ -17458,8 +17722,8 @@
         </p:nvSpPr>
         <p:spPr>
           <a:xfrm>
-            <a:off x="411480" y="3054096"/>
-            <a:ext cx="2743200" cy="713232"/>
+            <a:off x="411480" y="2935224"/>
+            <a:ext cx="2743200" cy="640080"/>
           </a:xfrm>
           <a:prstGeom prst="rect">
             <a:avLst/>
@@ -17504,8 +17768,8 @@
         </p:nvSpPr>
         <p:spPr>
           <a:xfrm>
-            <a:off x="493776" y="3118104"/>
-            <a:ext cx="2596896" cy="621792"/>
+            <a:off x="493776" y="2999232"/>
+            <a:ext cx="2596896" cy="548640"/>
           </a:xfrm>
           <a:prstGeom prst="rect">
             <a:avLst/>
@@ -17546,8 +17810,8 @@
         </p:nvSpPr>
         <p:spPr>
           <a:xfrm>
-            <a:off x="3154680" y="3054096"/>
-            <a:ext cx="1371600" cy="713232"/>
+            <a:off x="3154680" y="2935224"/>
+            <a:ext cx="1371600" cy="640080"/>
           </a:xfrm>
           <a:prstGeom prst="rect">
             <a:avLst/>
@@ -17592,8 +17856,8 @@
         </p:nvSpPr>
         <p:spPr>
           <a:xfrm>
-            <a:off x="3236976" y="3118104"/>
-            <a:ext cx="1225296" cy="621792"/>
+            <a:off x="3236976" y="2999232"/>
+            <a:ext cx="1225296" cy="548640"/>
           </a:xfrm>
           <a:prstGeom prst="rect">
             <a:avLst/>
@@ -17634,8 +17898,8 @@
         </p:nvSpPr>
         <p:spPr>
           <a:xfrm>
-            <a:off x="4526280" y="3054096"/>
-            <a:ext cx="6062472" cy="713232"/>
+            <a:off x="4526280" y="2935224"/>
+            <a:ext cx="6062472" cy="640080"/>
           </a:xfrm>
           <a:prstGeom prst="rect">
             <a:avLst/>
@@ -17680,8 +17944,8 @@
         </p:nvSpPr>
         <p:spPr>
           <a:xfrm>
-            <a:off x="4608576" y="3118104"/>
-            <a:ext cx="5916168" cy="621792"/>
+            <a:off x="4608576" y="2999232"/>
+            <a:ext cx="5916168" cy="548640"/>
           </a:xfrm>
           <a:prstGeom prst="rect">
             <a:avLst/>
@@ -17722,8 +17986,8 @@
         </p:nvSpPr>
         <p:spPr>
           <a:xfrm>
-            <a:off x="10588752" y="3054096"/>
-            <a:ext cx="1188720" cy="713232"/>
+            <a:off x="10588752" y="2935224"/>
+            <a:ext cx="1188720" cy="640080"/>
           </a:xfrm>
           <a:prstGeom prst="rect">
             <a:avLst/>
@@ -17768,8 +18032,8 @@
         </p:nvSpPr>
         <p:spPr>
           <a:xfrm>
-            <a:off x="10671048" y="3118104"/>
-            <a:ext cx="1042416" cy="621792"/>
+            <a:off x="10671048" y="2999232"/>
+            <a:ext cx="1042416" cy="548640"/>
           </a:xfrm>
           <a:prstGeom prst="rect">
             <a:avLst/>
@@ -17810,8 +18074,8 @@
         </p:nvSpPr>
         <p:spPr>
           <a:xfrm>
-            <a:off x="411480" y="3767328"/>
-            <a:ext cx="2743200" cy="713232"/>
+            <a:off x="411480" y="3575304"/>
+            <a:ext cx="2743200" cy="640080"/>
           </a:xfrm>
           <a:prstGeom prst="rect">
             <a:avLst/>
@@ -17856,8 +18120,8 @@
         </p:nvSpPr>
         <p:spPr>
           <a:xfrm>
-            <a:off x="493776" y="3831336"/>
-            <a:ext cx="2596896" cy="621792"/>
+            <a:off x="493776" y="3639312"/>
+            <a:ext cx="2596896" cy="548640"/>
           </a:xfrm>
           <a:prstGeom prst="rect">
             <a:avLst/>
@@ -17898,8 +18162,8 @@
         </p:nvSpPr>
         <p:spPr>
           <a:xfrm>
-            <a:off x="3154680" y="3767328"/>
-            <a:ext cx="1371600" cy="713232"/>
+            <a:off x="3154680" y="3575304"/>
+            <a:ext cx="1371600" cy="640080"/>
           </a:xfrm>
           <a:prstGeom prst="rect">
             <a:avLst/>
@@ -17944,8 +18208,8 @@
         </p:nvSpPr>
         <p:spPr>
           <a:xfrm>
-            <a:off x="3236976" y="3831336"/>
-            <a:ext cx="1225296" cy="621792"/>
+            <a:off x="3236976" y="3639312"/>
+            <a:ext cx="1225296" cy="548640"/>
           </a:xfrm>
           <a:prstGeom prst="rect">
             <a:avLst/>
@@ -17986,8 +18250,8 @@
         </p:nvSpPr>
         <p:spPr>
           <a:xfrm>
-            <a:off x="4526280" y="3767328"/>
-            <a:ext cx="6062472" cy="713232"/>
+            <a:off x="4526280" y="3575304"/>
+            <a:ext cx="6062472" cy="640080"/>
           </a:xfrm>
           <a:prstGeom prst="rect">
             <a:avLst/>
@@ -18032,8 +18296,8 @@
         </p:nvSpPr>
         <p:spPr>
           <a:xfrm>
-            <a:off x="4608576" y="3831336"/>
-            <a:ext cx="5916168" cy="621792"/>
+            <a:off x="4608576" y="3639312"/>
+            <a:ext cx="5916168" cy="548640"/>
           </a:xfrm>
           <a:prstGeom prst="rect">
             <a:avLst/>
@@ -18074,8 +18338,8 @@
         </p:nvSpPr>
         <p:spPr>
           <a:xfrm>
-            <a:off x="10588752" y="3767328"/>
-            <a:ext cx="1188720" cy="713232"/>
+            <a:off x="10588752" y="3575304"/>
+            <a:ext cx="1188720" cy="640080"/>
           </a:xfrm>
           <a:prstGeom prst="rect">
             <a:avLst/>
@@ -18120,8 +18384,8 @@
         </p:nvSpPr>
         <p:spPr>
           <a:xfrm>
-            <a:off x="10671048" y="3831336"/>
-            <a:ext cx="1042416" cy="621792"/>
+            <a:off x="10671048" y="3639312"/>
+            <a:ext cx="1042416" cy="548640"/>
           </a:xfrm>
           <a:prstGeom prst="rect">
             <a:avLst/>
@@ -18162,8 +18426,8 @@
         </p:nvSpPr>
         <p:spPr>
           <a:xfrm>
-            <a:off x="411480" y="4480560"/>
-            <a:ext cx="2743200" cy="713232"/>
+            <a:off x="411480" y="4215384"/>
+            <a:ext cx="2743200" cy="640080"/>
           </a:xfrm>
           <a:prstGeom prst="rect">
             <a:avLst/>
@@ -18208,8 +18472,8 @@
         </p:nvSpPr>
         <p:spPr>
           <a:xfrm>
-            <a:off x="493776" y="4544568"/>
-            <a:ext cx="2596896" cy="621792"/>
+            <a:off x="493776" y="4279392"/>
+            <a:ext cx="2596896" cy="548640"/>
           </a:xfrm>
           <a:prstGeom prst="rect">
             <a:avLst/>
@@ -18250,8 +18514,8 @@
         </p:nvSpPr>
         <p:spPr>
           <a:xfrm>
-            <a:off x="3154680" y="4480560"/>
-            <a:ext cx="1371600" cy="713232"/>
+            <a:off x="3154680" y="4215384"/>
+            <a:ext cx="1371600" cy="640080"/>
           </a:xfrm>
           <a:prstGeom prst="rect">
             <a:avLst/>
@@ -18296,8 +18560,8 @@
         </p:nvSpPr>
         <p:spPr>
           <a:xfrm>
-            <a:off x="3236976" y="4544568"/>
-            <a:ext cx="1225296" cy="621792"/>
+            <a:off x="3236976" y="4279392"/>
+            <a:ext cx="1225296" cy="548640"/>
           </a:xfrm>
           <a:prstGeom prst="rect">
             <a:avLst/>
@@ -18338,8 +18602,8 @@
         </p:nvSpPr>
         <p:spPr>
           <a:xfrm>
-            <a:off x="4526280" y="4480560"/>
-            <a:ext cx="6062472" cy="713232"/>
+            <a:off x="4526280" y="4215384"/>
+            <a:ext cx="6062472" cy="640080"/>
           </a:xfrm>
           <a:prstGeom prst="rect">
             <a:avLst/>
@@ -18384,8 +18648,8 @@
         </p:nvSpPr>
         <p:spPr>
           <a:xfrm>
-            <a:off x="4608576" y="4544568"/>
-            <a:ext cx="5916168" cy="621792"/>
+            <a:off x="4608576" y="4279392"/>
+            <a:ext cx="5916168" cy="548640"/>
           </a:xfrm>
           <a:prstGeom prst="rect">
             <a:avLst/>
@@ -18426,8 +18690,8 @@
         </p:nvSpPr>
         <p:spPr>
           <a:xfrm>
-            <a:off x="10588752" y="4480560"/>
-            <a:ext cx="1188720" cy="713232"/>
+            <a:off x="10588752" y="4215384"/>
+            <a:ext cx="1188720" cy="640080"/>
           </a:xfrm>
           <a:prstGeom prst="rect">
             <a:avLst/>
@@ -18472,8 +18736,8 @@
         </p:nvSpPr>
         <p:spPr>
           <a:xfrm>
-            <a:off x="10671048" y="4544568"/>
-            <a:ext cx="1042416" cy="621792"/>
+            <a:off x="10671048" y="4279392"/>
+            <a:ext cx="1042416" cy="548640"/>
           </a:xfrm>
           <a:prstGeom prst="rect">
             <a:avLst/>
@@ -18514,8 +18778,8 @@
         </p:nvSpPr>
         <p:spPr>
           <a:xfrm>
-            <a:off x="411480" y="5193792"/>
-            <a:ext cx="2743200" cy="713232"/>
+            <a:off x="411480" y="4855464"/>
+            <a:ext cx="2743200" cy="640080"/>
           </a:xfrm>
           <a:prstGeom prst="rect">
             <a:avLst/>
@@ -18560,8 +18824,8 @@
         </p:nvSpPr>
         <p:spPr>
           <a:xfrm>
-            <a:off x="493776" y="5257800"/>
-            <a:ext cx="2596896" cy="621792"/>
+            <a:off x="493776" y="4919472"/>
+            <a:ext cx="2596896" cy="548640"/>
           </a:xfrm>
           <a:prstGeom prst="rect">
             <a:avLst/>
@@ -18589,7 +18853,7 @@
                 </a:solidFill>
                 <a:latin typeface="Calibri"/>
               </a:rPr>
-              <a:t>The run itself</a:t>
+              <a:t>Geometry safety checks on the automated route</a:t>
             </a:r>
           </a:p>
         </p:txBody>
@@ -18602,8 +18866,8 @@
         </p:nvSpPr>
         <p:spPr>
           <a:xfrm>
-            <a:off x="3154680" y="5193792"/>
-            <a:ext cx="1371600" cy="713232"/>
+            <a:off x="3154680" y="4855464"/>
+            <a:ext cx="1371600" cy="640080"/>
           </a:xfrm>
           <a:prstGeom prst="rect">
             <a:avLst/>
@@ -18648,8 +18912,8 @@
         </p:nvSpPr>
         <p:spPr>
           <a:xfrm>
-            <a:off x="3236976" y="5257800"/>
-            <a:ext cx="1225296" cy="621792"/>
+            <a:off x="3236976" y="4919472"/>
+            <a:ext cx="1225296" cy="548640"/>
           </a:xfrm>
           <a:prstGeom prst="rect">
             <a:avLst/>
@@ -18677,7 +18941,7 @@
                 </a:solidFill>
                 <a:latin typeface="Calibri"/>
               </a:rPr>
-              <a:t>The new work</a:t>
+              <a:t>Blocks trust</a:t>
             </a:r>
           </a:p>
         </p:txBody>
@@ -18690,8 +18954,8 @@
         </p:nvSpPr>
         <p:spPr>
           <a:xfrm>
-            <a:off x="4526280" y="5193792"/>
-            <a:ext cx="6062472" cy="713232"/>
+            <a:off x="4526280" y="4855464"/>
+            <a:ext cx="6062472" cy="640080"/>
           </a:xfrm>
           <a:prstGeom prst="rect">
             <a:avLst/>
@@ -18736,8 +19000,8 @@
         </p:nvSpPr>
         <p:spPr>
           <a:xfrm>
-            <a:off x="4608576" y="5257800"/>
-            <a:ext cx="5916168" cy="621792"/>
+            <a:off x="4608576" y="4919472"/>
+            <a:ext cx="5916168" cy="548640"/>
           </a:xfrm>
           <a:prstGeom prst="rect">
             <a:avLst/>
@@ -18765,7 +19029,7 @@
                 </a:solidFill>
                 <a:latin typeface="Calibri"/>
               </a:rPr>
-              <a:t>A list in, a job queue, a report out, and a way to answer one question once and apply it to every part it affects.</a:t>
+              <a:t>The checks that compare what was read against what was measured run on the CAD route today. The automated route validates the fields only. They must be wired on before a run is left unattended.</a:t>
             </a:r>
           </a:p>
         </p:txBody>
@@ -18778,8 +19042,8 @@
         </p:nvSpPr>
         <p:spPr>
           <a:xfrm>
-            <a:off x="10588752" y="5193792"/>
-            <a:ext cx="1188720" cy="713232"/>
+            <a:off x="10588752" y="4855464"/>
+            <a:ext cx="1188720" cy="640080"/>
           </a:xfrm>
           <a:prstGeom prst="rect">
             <a:avLst/>
@@ -18824,8 +19088,8 @@
         </p:nvSpPr>
         <p:spPr>
           <a:xfrm>
-            <a:off x="10671048" y="5257800"/>
-            <a:ext cx="1042416" cy="621792"/>
+            <a:off x="10671048" y="4919472"/>
+            <a:ext cx="1042416" cy="548640"/>
           </a:xfrm>
           <a:prstGeom prst="rect">
             <a:avLst/>
@@ -18849,36 +19113,36 @@
             <a:r>
               <a:rPr sz="980" b="1" i="0">
                 <a:solidFill>
-                  <a:srgbClr val="1D6FB8"/>
-                </a:solidFill>
-                <a:latin typeface="Calibri"/>
-              </a:rPr>
-              <a:t>New build</a:t>
-            </a:r>
-          </a:p>
-        </p:txBody>
-      </p:sp>
-      <p:sp>
-        <p:nvSpPr>
-          <p:cNvPr id="58" name="Rounded Rectangle 57"/>
+                  <a:srgbClr val="B03A2E"/>
+                </a:solidFill>
+                <a:latin typeface="Calibri"/>
+              </a:rPr>
+              <a:t>Must have</a:t>
+            </a:r>
+          </a:p>
+        </p:txBody>
+      </p:sp>
+      <p:sp>
+        <p:nvSpPr>
+          <p:cNvPr id="58" name="Rectangle 57"/>
           <p:cNvSpPr/>
           <p:nvPr/>
         </p:nvSpPr>
         <p:spPr>
           <a:xfrm>
-            <a:off x="411480" y="6016752"/>
-            <a:ext cx="11365992" cy="768096"/>
-          </a:xfrm>
-          <a:prstGeom prst="roundRect">
-            <a:avLst>
-              <a:gd name="adj" fmla="val 12000"/>
-            </a:avLst>
-          </a:prstGeom>
-          <a:solidFill>
-            <a:srgbClr val="EAF6EF"/>
-          </a:solidFill>
-          <a:ln>
-            <a:noFill/>
+            <a:off x="411480" y="5495544"/>
+            <a:ext cx="2743200" cy="640080"/>
+          </a:xfrm>
+          <a:prstGeom prst="rect">
+            <a:avLst/>
+          </a:prstGeom>
+          <a:solidFill>
+            <a:srgbClr val="F4F7FB"/>
+          </a:solidFill>
+          <a:ln w="9525">
+            <a:solidFill>
+              <a:srgbClr val="DCE3EE"/>
+            </a:solidFill>
           </a:ln>
           <a:effectLst/>
         </p:spPr>
@@ -18906,23 +19170,67 @@
       </p:sp>
       <p:sp>
         <p:nvSpPr>
-          <p:cNvPr id="59" name="Rectangle 58"/>
+          <p:cNvPr id="59" name="TextBox 58"/>
+          <p:cNvSpPr txBox="1"/>
+          <p:nvPr/>
+        </p:nvSpPr>
+        <p:spPr>
+          <a:xfrm>
+            <a:off x="493776" y="5559552"/>
+            <a:ext cx="2596896" cy="548640"/>
+          </a:xfrm>
+          <a:prstGeom prst="rect">
+            <a:avLst/>
+          </a:prstGeom>
+          <a:noFill/>
+        </p:spPr>
+        <p:txBody>
+          <a:bodyPr wrap="square" anchor="t" lIns="0" rIns="0" tIns="0" bIns="0">
+            <a:spAutoFit/>
+          </a:bodyPr>
+          <a:lstStyle/>
+          <a:p>
+            <a:pPr algn="l">
+              <a:lnSpc>
+                <a:spcPct val="100000"/>
+              </a:lnSpc>
+              <a:spcAft>
+                <a:spcPts val="400"/>
+              </a:spcAft>
+            </a:pPr>
+            <a:r>
+              <a:rPr sz="980" b="1" i="0">
+                <a:solidFill>
+                  <a:srgbClr val="16325C"/>
+                </a:solidFill>
+                <a:latin typeface="Calibri"/>
+              </a:rPr>
+              <a:t>The run itself</a:t>
+            </a:r>
+          </a:p>
+        </p:txBody>
+      </p:sp>
+      <p:sp>
+        <p:nvSpPr>
+          <p:cNvPr id="60" name="Rectangle 59"/>
           <p:cNvSpPr/>
           <p:nvPr/>
         </p:nvSpPr>
         <p:spPr>
           <a:xfrm>
-            <a:off x="411480" y="6016752"/>
-            <a:ext cx="68580" cy="768096"/>
-          </a:xfrm>
-          <a:prstGeom prst="rect">
-            <a:avLst/>
-          </a:prstGeom>
-          <a:solidFill>
-            <a:srgbClr val="2E8B57"/>
-          </a:solidFill>
-          <a:ln>
-            <a:noFill/>
+            <a:off x="3154680" y="5495544"/>
+            <a:ext cx="1371600" cy="640080"/>
+          </a:xfrm>
+          <a:prstGeom prst="rect">
+            <a:avLst/>
+          </a:prstGeom>
+          <a:solidFill>
+            <a:srgbClr val="F4F7FB"/>
+          </a:solidFill>
+          <a:ln w="9525">
+            <a:solidFill>
+              <a:srgbClr val="DCE3EE"/>
+            </a:solidFill>
           </a:ln>
           <a:effectLst/>
         </p:spPr>
@@ -18950,14 +19258,14 @@
       </p:sp>
       <p:sp>
         <p:nvSpPr>
-          <p:cNvPr id="60" name="TextBox 59"/>
+          <p:cNvPr id="61" name="TextBox 60"/>
           <p:cNvSpPr txBox="1"/>
           <p:nvPr/>
         </p:nvSpPr>
         <p:spPr>
           <a:xfrm>
-            <a:off x="630936" y="6135624"/>
-            <a:ext cx="10954512" cy="256032"/>
+            <a:off x="3236976" y="5559552"/>
+            <a:ext cx="1225296" cy="548640"/>
           </a:xfrm>
           <a:prstGeom prst="rect">
             <a:avLst/>
@@ -18979,27 +19287,73 @@
               </a:spcAft>
             </a:pPr>
             <a:r>
-              <a:rPr sz="1200" b="1" i="0">
-                <a:solidFill>
-                  <a:srgbClr val="2E8B57"/>
-                </a:solidFill>
-                <a:latin typeface="Calibri"/>
-              </a:rPr>
-              <a:t>The good news underneath all of that</a:t>
-            </a:r>
-          </a:p>
-        </p:txBody>
-      </p:sp>
-      <p:sp>
-        <p:nvSpPr>
-          <p:cNvPr id="61" name="TextBox 60"/>
+              <a:rPr sz="980" b="0" i="0">
+                <a:solidFill>
+                  <a:srgbClr val="3A4356"/>
+                </a:solidFill>
+                <a:latin typeface="Calibri"/>
+              </a:rPr>
+              <a:t>The new work</a:t>
+            </a:r>
+          </a:p>
+        </p:txBody>
+      </p:sp>
+      <p:sp>
+        <p:nvSpPr>
+          <p:cNvPr id="62" name="Rectangle 61"/>
+          <p:cNvSpPr/>
+          <p:nvPr/>
+        </p:nvSpPr>
+        <p:spPr>
+          <a:xfrm>
+            <a:off x="4526280" y="5495544"/>
+            <a:ext cx="6062472" cy="640080"/>
+          </a:xfrm>
+          <a:prstGeom prst="rect">
+            <a:avLst/>
+          </a:prstGeom>
+          <a:solidFill>
+            <a:srgbClr val="F4F7FB"/>
+          </a:solidFill>
+          <a:ln w="9525">
+            <a:solidFill>
+              <a:srgbClr val="DCE3EE"/>
+            </a:solidFill>
+          </a:ln>
+          <a:effectLst/>
+        </p:spPr>
+        <p:style>
+          <a:lnRef idx="1">
+            <a:schemeClr val="accent1"/>
+          </a:lnRef>
+          <a:fillRef idx="3">
+            <a:schemeClr val="accent1"/>
+          </a:fillRef>
+          <a:effectRef idx="2">
+            <a:schemeClr val="accent1"/>
+          </a:effectRef>
+          <a:fontRef idx="minor">
+            <a:schemeClr val="lt1"/>
+          </a:fontRef>
+        </p:style>
+        <p:txBody>
+          <a:bodyPr rtlCol="0" anchor="ctr"/>
+          <a:lstStyle/>
+          <a:p>
+            <a:pPr algn="ctr"/>
+          </a:p>
+        </p:txBody>
+      </p:sp>
+      <p:sp>
+        <p:nvSpPr>
+          <p:cNvPr id="63" name="TextBox 62"/>
           <p:cNvSpPr txBox="1"/>
           <p:nvPr/>
         </p:nvSpPr>
         <p:spPr>
           <a:xfrm>
-            <a:off x="630936" y="6419088"/>
-            <a:ext cx="10954512" cy="265176"/>
+            <a:off x="4608576" y="5559552"/>
+            <a:ext cx="5916168" cy="548640"/>
           </a:xfrm>
           <a:prstGeom prst="rect">
             <a:avLst/>
@@ -19014,6 +19368,268 @@
           <a:p>
             <a:pPr algn="l">
               <a:lnSpc>
+                <a:spcPct val="100000"/>
+              </a:lnSpc>
+              <a:spcAft>
+                <a:spcPts val="400"/>
+              </a:spcAft>
+            </a:pPr>
+            <a:r>
+              <a:rPr sz="980" b="0" i="0">
+                <a:solidFill>
+                  <a:srgbClr val="3A4356"/>
+                </a:solidFill>
+                <a:latin typeface="Calibri"/>
+              </a:rPr>
+              <a:t>A list in, a job queue, a report out, and a way to answer one question once and apply it to every part it affects.</a:t>
+            </a:r>
+          </a:p>
+        </p:txBody>
+      </p:sp>
+      <p:sp>
+        <p:nvSpPr>
+          <p:cNvPr id="64" name="Rectangle 63"/>
+          <p:cNvSpPr/>
+          <p:nvPr/>
+        </p:nvSpPr>
+        <p:spPr>
+          <a:xfrm>
+            <a:off x="10588752" y="5495544"/>
+            <a:ext cx="1188720" cy="640080"/>
+          </a:xfrm>
+          <a:prstGeom prst="rect">
+            <a:avLst/>
+          </a:prstGeom>
+          <a:solidFill>
+            <a:srgbClr val="F4F7FB"/>
+          </a:solidFill>
+          <a:ln w="9525">
+            <a:solidFill>
+              <a:srgbClr val="DCE3EE"/>
+            </a:solidFill>
+          </a:ln>
+          <a:effectLst/>
+        </p:spPr>
+        <p:style>
+          <a:lnRef idx="1">
+            <a:schemeClr val="accent1"/>
+          </a:lnRef>
+          <a:fillRef idx="3">
+            <a:schemeClr val="accent1"/>
+          </a:fillRef>
+          <a:effectRef idx="2">
+            <a:schemeClr val="accent1"/>
+          </a:effectRef>
+          <a:fontRef idx="minor">
+            <a:schemeClr val="lt1"/>
+          </a:fontRef>
+        </p:style>
+        <p:txBody>
+          <a:bodyPr rtlCol="0" anchor="ctr"/>
+          <a:lstStyle/>
+          <a:p>
+            <a:pPr algn="ctr"/>
+          </a:p>
+        </p:txBody>
+      </p:sp>
+      <p:sp>
+        <p:nvSpPr>
+          <p:cNvPr id="65" name="TextBox 64"/>
+          <p:cNvSpPr txBox="1"/>
+          <p:nvPr/>
+        </p:nvSpPr>
+        <p:spPr>
+          <a:xfrm>
+            <a:off x="10671048" y="5559552"/>
+            <a:ext cx="1042416" cy="548640"/>
+          </a:xfrm>
+          <a:prstGeom prst="rect">
+            <a:avLst/>
+          </a:prstGeom>
+          <a:noFill/>
+        </p:spPr>
+        <p:txBody>
+          <a:bodyPr wrap="square" anchor="t" lIns="0" rIns="0" tIns="0" bIns="0">
+            <a:spAutoFit/>
+          </a:bodyPr>
+          <a:lstStyle/>
+          <a:p>
+            <a:pPr algn="l">
+              <a:lnSpc>
+                <a:spcPct val="100000"/>
+              </a:lnSpc>
+              <a:spcAft>
+                <a:spcPts val="400"/>
+              </a:spcAft>
+            </a:pPr>
+            <a:r>
+              <a:rPr sz="980" b="1" i="0">
+                <a:solidFill>
+                  <a:srgbClr val="1D6FB8"/>
+                </a:solidFill>
+                <a:latin typeface="Calibri"/>
+              </a:rPr>
+              <a:t>New build</a:t>
+            </a:r>
+          </a:p>
+        </p:txBody>
+      </p:sp>
+      <p:sp>
+        <p:nvSpPr>
+          <p:cNvPr id="66" name="Rounded Rectangle 65"/>
+          <p:cNvSpPr/>
+          <p:nvPr/>
+        </p:nvSpPr>
+        <p:spPr>
+          <a:xfrm>
+            <a:off x="411480" y="6163056"/>
+            <a:ext cx="11365992" cy="603504"/>
+          </a:xfrm>
+          <a:prstGeom prst="roundRect">
+            <a:avLst>
+              <a:gd name="adj" fmla="val 12000"/>
+            </a:avLst>
+          </a:prstGeom>
+          <a:solidFill>
+            <a:srgbClr val="EAF6EF"/>
+          </a:solidFill>
+          <a:ln>
+            <a:noFill/>
+          </a:ln>
+          <a:effectLst/>
+        </p:spPr>
+        <p:style>
+          <a:lnRef idx="1">
+            <a:schemeClr val="accent1"/>
+          </a:lnRef>
+          <a:fillRef idx="3">
+            <a:schemeClr val="accent1"/>
+          </a:fillRef>
+          <a:effectRef idx="2">
+            <a:schemeClr val="accent1"/>
+          </a:effectRef>
+          <a:fontRef idx="minor">
+            <a:schemeClr val="lt1"/>
+          </a:fontRef>
+        </p:style>
+        <p:txBody>
+          <a:bodyPr rtlCol="0" anchor="ctr"/>
+          <a:lstStyle/>
+          <a:p>
+            <a:pPr algn="ctr"/>
+          </a:p>
+        </p:txBody>
+      </p:sp>
+      <p:sp>
+        <p:nvSpPr>
+          <p:cNvPr id="67" name="Rectangle 66"/>
+          <p:cNvSpPr/>
+          <p:nvPr/>
+        </p:nvSpPr>
+        <p:spPr>
+          <a:xfrm>
+            <a:off x="411480" y="6163056"/>
+            <a:ext cx="68580" cy="603504"/>
+          </a:xfrm>
+          <a:prstGeom prst="rect">
+            <a:avLst/>
+          </a:prstGeom>
+          <a:solidFill>
+            <a:srgbClr val="2E8B57"/>
+          </a:solidFill>
+          <a:ln>
+            <a:noFill/>
+          </a:ln>
+          <a:effectLst/>
+        </p:spPr>
+        <p:style>
+          <a:lnRef idx="1">
+            <a:schemeClr val="accent1"/>
+          </a:lnRef>
+          <a:fillRef idx="3">
+            <a:schemeClr val="accent1"/>
+          </a:fillRef>
+          <a:effectRef idx="2">
+            <a:schemeClr val="accent1"/>
+          </a:effectRef>
+          <a:fontRef idx="minor">
+            <a:schemeClr val="lt1"/>
+          </a:fontRef>
+        </p:style>
+        <p:txBody>
+          <a:bodyPr rtlCol="0" anchor="ctr"/>
+          <a:lstStyle/>
+          <a:p>
+            <a:pPr algn="ctr"/>
+          </a:p>
+        </p:txBody>
+      </p:sp>
+      <p:sp>
+        <p:nvSpPr>
+          <p:cNvPr id="68" name="TextBox 67"/>
+          <p:cNvSpPr txBox="1"/>
+          <p:nvPr/>
+        </p:nvSpPr>
+        <p:spPr>
+          <a:xfrm>
+            <a:off x="630936" y="6281928"/>
+            <a:ext cx="10954512" cy="256032"/>
+          </a:xfrm>
+          <a:prstGeom prst="rect">
+            <a:avLst/>
+          </a:prstGeom>
+          <a:noFill/>
+        </p:spPr>
+        <p:txBody>
+          <a:bodyPr wrap="square" anchor="t" lIns="0" rIns="0" tIns="0" bIns="0">
+            <a:spAutoFit/>
+          </a:bodyPr>
+          <a:lstStyle/>
+          <a:p>
+            <a:pPr algn="l">
+              <a:lnSpc>
+                <a:spcPct val="100000"/>
+              </a:lnSpc>
+              <a:spcAft>
+                <a:spcPts val="400"/>
+              </a:spcAft>
+            </a:pPr>
+            <a:r>
+              <a:rPr sz="1200" b="1" i="0">
+                <a:solidFill>
+                  <a:srgbClr val="2E8B57"/>
+                </a:solidFill>
+                <a:latin typeface="Calibri"/>
+              </a:rPr>
+              <a:t>The good news underneath all of that</a:t>
+            </a:r>
+          </a:p>
+        </p:txBody>
+      </p:sp>
+      <p:sp>
+        <p:nvSpPr>
+          <p:cNvPr id="69" name="TextBox 68"/>
+          <p:cNvSpPr txBox="1"/>
+          <p:nvPr/>
+        </p:nvSpPr>
+        <p:spPr>
+          <a:xfrm>
+            <a:off x="630936" y="6565392"/>
+            <a:ext cx="10954512" cy="109728"/>
+          </a:xfrm>
+          <a:prstGeom prst="rect">
+            <a:avLst/>
+          </a:prstGeom>
+          <a:noFill/>
+        </p:spPr>
+        <p:txBody>
+          <a:bodyPr wrap="square" anchor="t" lIns="0" rIns="0" tIns="0" bIns="0">
+            <a:spAutoFit/>
+          </a:bodyPr>
+          <a:lstStyle/>
+          <a:p>
+            <a:pPr algn="l">
+              <a:lnSpc>
                 <a:spcPct val="114000"/>
               </a:lnSpc>
               <a:spcAft>
@@ -19027,7 +19643,7 @@
                 </a:solidFill>
                 <a:latin typeface="Calibri"/>
               </a:rPr>
-              <a:t>The costing engine itself needs no change. We tested it on its own, outside the application, and it produced the full eight-bucket answer with nothing adjusted. The work above sits around the engine.</a:t>
+              <a:t>The costing engine itself needs no change. We ran it on its own, outside the application, and it produced the full eight-bucket answer with nothing adjusted.</a:t>
             </a:r>
           </a:p>
         </p:txBody>
@@ -35068,7 +35684,7 @@
                 </a:solidFill>
                 <a:latin typeface="Calibri"/>
               </a:rPr>
-              <a:t>182 values worked out, 139 land in a named box</a:t>
+              <a:t>165 costing rules, 149 write into a named box</a:t>
             </a:r>
           </a:p>
         </p:txBody>
@@ -35156,7 +35772,7 @@
                 </a:solidFill>
                 <a:latin typeface="Calibri"/>
               </a:rPr>
-              <a:t>Counted in the rules packs for the twelve part types that have them</a:t>
+              <a:t>Counted in the rule packs for the twelve part types that have them; 9 to 18 apply per part</a:t>
             </a:r>
           </a:p>
         </p:txBody>
@@ -35948,7 +36564,7 @@
                 </a:solidFill>
                 <a:latin typeface="Calibri"/>
               </a:rPr>
-              <a:t>1.2 seconds to measure a part</a:t>
+              <a:t>0.9 to 3.1 seconds to measure a part</a:t>
             </a:r>
           </a:p>
         </p:txBody>
@@ -36036,7 +36652,7 @@
                 </a:solidFill>
                 <a:latin typeface="Calibri"/>
               </a:rPr>
-              <a:t>Average over eight real parts, 0.6 MB to 20 MB, this month</a:t>
+              <a:t>Five real production parts, 0.6 MB to 3.0 MB, this month</a:t>
             </a:r>
           </a:p>
         </p:txBody>
@@ -36124,7 +36740,7 @@
                 </a:solidFill>
                 <a:latin typeface="Calibri"/>
               </a:rPr>
-              <a:t>500 parts in about five minutes</a:t>
+              <a:t>40 parts in 31 seconds on two workers</a:t>
             </a:r>
           </a:p>
         </p:txBody>
@@ -36212,7 +36828,7 @@
                 </a:solidFill>
                 <a:latin typeface="Calibri"/>
               </a:rPr>
-              <a:t>That average, on two measuring workers, measured not estimated</a:t>
+              <a:t>Measured wall-clock, nothing reused from cache; larger rows carry that rate forward</a:t>
             </a:r>
           </a:p>
         </p:txBody>
@@ -36388,7 +37004,7 @@
                 </a:solidFill>
                 <a:latin typeface="Calibri"/>
               </a:rPr>
-              <a:t>Two stopped and asked. Our own parts, not JLR parts</a:t>
+              <a:t>With the material family given. Given nothing, all eight ask for it first</a:t>
             </a:r>
           </a:p>
         </p:txBody>
@@ -37784,8 +38400,8 @@
         </p:nvSpPr>
         <p:spPr>
           <a:xfrm>
-            <a:off x="411480" y="1645920"/>
-            <a:ext cx="5577840" cy="3200400"/>
+            <a:off x="411480" y="1627632"/>
+            <a:ext cx="5577840" cy="3383280"/>
           </a:xfrm>
           <a:prstGeom prst="roundRect">
             <a:avLst>
@@ -37832,8 +38448,8 @@
         </p:nvSpPr>
         <p:spPr>
           <a:xfrm>
-            <a:off x="411480" y="1645920"/>
-            <a:ext cx="68580" cy="3200400"/>
+            <a:off x="411480" y="1627632"/>
+            <a:ext cx="68580" cy="3383280"/>
           </a:xfrm>
           <a:prstGeom prst="rect">
             <a:avLst/>
@@ -37876,7 +38492,7 @@
         </p:nvSpPr>
         <p:spPr>
           <a:xfrm>
-            <a:off x="612648" y="1773936"/>
+            <a:off x="612648" y="1755648"/>
             <a:ext cx="5212080" cy="274320"/>
           </a:xfrm>
           <a:prstGeom prst="rect">
@@ -37918,8 +38534,8 @@
         </p:nvSpPr>
         <p:spPr>
           <a:xfrm>
-            <a:off x="612648" y="2084832"/>
-            <a:ext cx="5212080" cy="2651760"/>
+            <a:off x="612648" y="2066544"/>
+            <a:ext cx="5212080" cy="2834640"/>
           </a:xfrm>
           <a:prstGeom prst="rect">
             <a:avLst/>
@@ -37978,16 +38594,6 @@
                 <a:spcPts val="300"/>
               </a:spcAft>
             </a:pPr>
-          </a:p>
-          <a:p>
-            <a:pPr algn="l">
-              <a:lnSpc>
-                <a:spcPct val="112000"/>
-              </a:lnSpc>
-              <a:spcAft>
-                <a:spcPts val="300"/>
-              </a:spcAft>
-            </a:pPr>
             <a:r>
               <a:rPr sz="1050" b="1" i="0">
                 <a:solidFill>
@@ -38142,8 +38748,8 @@
         </p:nvSpPr>
         <p:spPr>
           <a:xfrm>
-            <a:off x="6199632" y="1645920"/>
-            <a:ext cx="5577840" cy="3200400"/>
+            <a:off x="6199632" y="1627632"/>
+            <a:ext cx="5577840" cy="3383280"/>
           </a:xfrm>
           <a:prstGeom prst="roundRect">
             <a:avLst>
@@ -38190,8 +38796,8 @@
         </p:nvSpPr>
         <p:spPr>
           <a:xfrm>
-            <a:off x="6199632" y="1645920"/>
-            <a:ext cx="68580" cy="3200400"/>
+            <a:off x="6199632" y="1627632"/>
+            <a:ext cx="68580" cy="3383280"/>
           </a:xfrm>
           <a:prstGeom prst="rect">
             <a:avLst/>
@@ -38234,7 +38840,7 @@
         </p:nvSpPr>
         <p:spPr>
           <a:xfrm>
-            <a:off x="6400800" y="1773936"/>
+            <a:off x="6400800" y="1755648"/>
             <a:ext cx="5212080" cy="274320"/>
           </a:xfrm>
           <a:prstGeom prst="rect">
@@ -38276,8 +38882,8 @@
         </p:nvSpPr>
         <p:spPr>
           <a:xfrm>
-            <a:off x="6400800" y="2084832"/>
-            <a:ext cx="5212080" cy="2651760"/>
+            <a:off x="6400800" y="2066544"/>
+            <a:ext cx="5212080" cy="2834640"/>
           </a:xfrm>
           <a:prstGeom prst="rect">
             <a:avLst/>
@@ -38317,6 +38923,15 @@
                 <a:spcPts val="300"/>
               </a:spcAft>
             </a:pPr>
+            <a:r>
+              <a:rPr sz="1050" b="1" i="0">
+                <a:solidFill>
+                  <a:srgbClr val="16325C"/>
+                </a:solidFill>
+                <a:latin typeface="Calibri"/>
+              </a:rPr>
+              <a:t>Measured off the model:</a:t>
+            </a:r>
           </a:p>
           <a:p>
             <a:pPr algn="l">
@@ -38328,13 +38943,61 @@
               </a:spcAft>
             </a:pPr>
             <a:r>
+              <a:rPr sz="1050" b="0" i="0">
+                <a:solidFill>
+                  <a:srgbClr val="3A4356"/>
+                </a:solidFill>
+                <a:latin typeface="Calibri"/>
+              </a:rPr>
+              <a:t>volume, size, surface area, wall thickness, holes,</a:t>
+            </a:r>
+          </a:p>
+          <a:p>
+            <a:pPr algn="l">
+              <a:lnSpc>
+                <a:spcPct val="112000"/>
+              </a:lnSpc>
+              <a:spcAft>
+                <a:spcPts val="300"/>
+              </a:spcAft>
+            </a:pPr>
+            <a:r>
+              <a:rPr sz="1050" b="0" i="0">
+                <a:solidFill>
+                  <a:srgbClr val="3A4356"/>
+                </a:solidFill>
+                <a:latin typeface="Calibri"/>
+              </a:rPr>
+              <a:t>pockets, bosses, gear teeth, bend count.</a:t>
+            </a:r>
+          </a:p>
+          <a:p>
+            <a:pPr algn="l">
+              <a:lnSpc>
+                <a:spcPct val="112000"/>
+              </a:lnSpc>
+              <a:spcAft>
+                <a:spcPts val="300"/>
+              </a:spcAft>
+            </a:pPr>
+          </a:p>
+          <a:p>
+            <a:pPr algn="l">
+              <a:lnSpc>
+                <a:spcPct val="112000"/>
+              </a:lnSpc>
+              <a:spcAft>
+                <a:spcPts val="300"/>
+              </a:spcAft>
+            </a:pPr>
+            <a:r>
               <a:rPr sz="1050" b="1" i="0">
                 <a:solidFill>
                   <a:srgbClr val="16325C"/>
                 </a:solidFill>
                 <a:latin typeface="Calibri"/>
               </a:rPr>
-              <a:t>Measured off the model:</a:t>
+              <a:t>Read off the drawing:</a:t>
             </a:r>
           </a:p>
           <a:p>
@@ -38353,7 +39016,7 @@
                 </a:solidFill>
                 <a:latin typeface="Calibri"/>
               </a:rPr>
-              <a:t>volume, size, surface area, wall thickness, holes,</a:t>
+              <a:t>tolerances, surface finish, heat treatment, coating,</a:t>
             </a:r>
           </a:p>
           <a:p>
@@ -38372,7 +39035,7 @@
                 </a:solidFill>
                 <a:latin typeface="Calibri"/>
               </a:rPr>
-              <a:t>pockets, bosses, gear teeth, bend count.</a:t>
+              <a:t>masked features.</a:t>
             </a:r>
           </a:p>
           <a:p>
@@ -38401,7 +39064,7 @@
                 </a:solidFill>
                 <a:latin typeface="Calibri"/>
               </a:rPr>
-              <a:t>Read off the drawing:</a:t>
+              <a:t>165 costing rules fill the form. 149 write straight</a:t>
             </a:r>
           </a:p>
           <a:p>
@@ -38414,99 +39077,13 @@
               </a:spcAft>
             </a:pPr>
             <a:r>
-              <a:rPr sz="1050" b="0" i="0">
-                <a:solidFill>
-                  <a:srgbClr val="3A4356"/>
-                </a:solidFill>
-                <a:latin typeface="Calibri"/>
-              </a:rPr>
-              <a:t>tolerances, surface finish, heat treatment, coating,</a:t>
-            </a:r>
-          </a:p>
-          <a:p>
-            <a:pPr algn="l">
-              <a:lnSpc>
-                <a:spcPct val="112000"/>
-              </a:lnSpc>
-              <a:spcAft>
-                <a:spcPts val="300"/>
-              </a:spcAft>
-            </a:pPr>
-            <a:r>
-              <a:rPr sz="1050" b="0" i="0">
-                <a:solidFill>
-                  <a:srgbClr val="3A4356"/>
-                </a:solidFill>
-                <a:latin typeface="Calibri"/>
-              </a:rPr>
-              <a:t>masked features.</a:t>
-            </a:r>
-          </a:p>
-          <a:p>
-            <a:pPr algn="l">
-              <a:lnSpc>
-                <a:spcPct val="112000"/>
-              </a:lnSpc>
-              <a:spcAft>
-                <a:spcPts val="300"/>
-              </a:spcAft>
-            </a:pPr>
-          </a:p>
-          <a:p>
-            <a:pPr algn="l">
-              <a:lnSpc>
-                <a:spcPct val="112000"/>
-              </a:lnSpc>
-              <a:spcAft>
-                <a:spcPts val="300"/>
-              </a:spcAft>
-            </a:pPr>
-            <a:r>
               <a:rPr sz="1050" b="1" i="0">
                 <a:solidFill>
-                  <a:srgbClr val="16325C"/>
-                </a:solidFill>
-                <a:latin typeface="Calibri"/>
-              </a:rPr>
-              <a:t>The tool works out 182 values and puts 139 of them</a:t>
-            </a:r>
-          </a:p>
-          <a:p>
-            <a:pPr algn="l">
-              <a:lnSpc>
-                <a:spcPct val="112000"/>
-              </a:lnSpc>
-              <a:spcAft>
-                <a:spcPts val="300"/>
-              </a:spcAft>
-            </a:pPr>
-            <a:r>
-              <a:rPr sz="1050" b="1" i="0">
-                <a:solidFill>
-                  <a:srgbClr val="16325C"/>
-                </a:solidFill>
-                <a:latin typeface="Calibri"/>
-              </a:rPr>
-              <a:t>straight into a named box. The same part gives the</a:t>
-            </a:r>
-          </a:p>
-          <a:p>
-            <a:pPr algn="l">
-              <a:lnSpc>
-                <a:spcPct val="112000"/>
-              </a:lnSpc>
-              <a:spcAft>
-                <a:spcPts val="300"/>
-              </a:spcAft>
-            </a:pPr>
-            <a:r>
-              <a:rPr sz="1050" b="1" i="0">
-                <a:solidFill>
                   <a:srgbClr val="2E8B57"/>
                 </a:solidFill>
                 <a:latin typeface="Calibri"/>
               </a:rPr>
-              <a:t>same numbers every time.</a:t>
+              <a:t>into a named box. Same part, same numbers, always.</a:t>
             </a:r>
           </a:p>
         </p:txBody>
@@ -39322,6 +39899,44 @@
                 </a:solidFill>
                 <a:latin typeface="Calibri"/>
               </a:rPr>
+              <a:t>(needs the AI service; the default setting runs without</a:t>
+            </a:r>
+          </a:p>
+          <a:p>
+            <a:pPr algn="l">
+              <a:lnSpc>
+                <a:spcPct val="112000"/>
+              </a:lnSpc>
+              <a:spcAft>
+                <a:spcPts val="300"/>
+              </a:spcAft>
+            </a:pPr>
+            <a:r>
+              <a:rPr sz="1050" b="0" i="0">
+                <a:solidFill>
+                  <a:srgbClr val="3A4356"/>
+                </a:solidFill>
+                <a:latin typeface="Calibri"/>
+              </a:rPr>
+              <a:t>it and still costs the part)</a:t>
+            </a:r>
+          </a:p>
+          <a:p>
+            <a:pPr algn="l">
+              <a:lnSpc>
+                <a:spcPct val="112000"/>
+              </a:lnSpc>
+              <a:spcAft>
+                <a:spcPts val="300"/>
+              </a:spcAft>
+            </a:pPr>
+            <a:r>
+              <a:rPr sz="1050" b="0" i="0">
+                <a:solidFill>
+                  <a:srgbClr val="3A4356"/>
+                </a:solidFill>
+                <a:latin typeface="Calibri"/>
+              </a:rPr>
               <a:t>Refuses geometry it cannot honestly measure</a:t>
             </a:r>
           </a:p>
@@ -39360,7 +39975,26 @@
                 </a:solidFill>
                 <a:latin typeface="Calibri"/>
               </a:rPr>
-              <a:t>Same safety checks on every route, printed in the report</a:t>
+              <a:t>Same safety checks on every CAD route, printed in the</a:t>
+            </a:r>
+          </a:p>
+          <a:p>
+            <a:pPr algn="l">
+              <a:lnSpc>
+                <a:spcPct val="112000"/>
+              </a:lnSpc>
+              <a:spcAft>
+                <a:spcPts val="300"/>
+              </a:spcAft>
+            </a:pPr>
+            <a:r>
+              <a:rPr sz="1050" b="0" i="0">
+                <a:solidFill>
+                  <a:srgbClr val="3A4356"/>
+                </a:solidFill>
+                <a:latin typeface="Calibri"/>
+              </a:rPr>
+              <a:t>report</a:t>
             </a:r>
           </a:p>
           <a:p>
@@ -39745,6 +40379,44 @@
                 </a:solidFill>
                 <a:latin typeface="Calibri"/>
               </a:rPr>
+              <a:t>The geometry safety checks run on the CAD route, not</a:t>
+            </a:r>
+          </a:p>
+          <a:p>
+            <a:pPr algn="l">
+              <a:lnSpc>
+                <a:spcPct val="112000"/>
+              </a:lnSpc>
+              <a:spcAft>
+                <a:spcPts val="300"/>
+              </a:spcAft>
+            </a:pPr>
+            <a:r>
+              <a:rPr sz="1050" b="0" i="0">
+                <a:solidFill>
+                  <a:srgbClr val="3A4356"/>
+                </a:solidFill>
+                <a:latin typeface="Calibri"/>
+              </a:rPr>
+              <a:t>yet on the automated one</a:t>
+            </a:r>
+          </a:p>
+          <a:p>
+            <a:pPr algn="l">
+              <a:lnSpc>
+                <a:spcPct val="112000"/>
+              </a:lnSpc>
+              <a:spcAft>
+                <a:spcPts val="300"/>
+              </a:spcAft>
+            </a:pPr>
+            <a:r>
+              <a:rPr sz="1050" b="0" i="0">
+                <a:solidFill>
+                  <a:srgbClr val="3A4356"/>
+                </a:solidFill>
+                <a:latin typeface="Calibri"/>
+              </a:rPr>
               <a:t>Still under active development</a:t>
             </a:r>
           </a:p>
@@ -39919,7 +40591,7 @@
                 </a:solidFill>
                 <a:latin typeface="Calibri"/>
               </a:rPr>
-              <a:t>Six rounds of work in the last few weeks. The tool now refuses bad geometry instead of costing it, asks about units, runs the same checks on every route and prints them in the report, measures a file once instead of four times, and widens its own confidence range when a number was typed rather than measured.</a:t>
+              <a:t>Six rounds of work in the last few weeks. The tool now refuses bad geometry instead of costing it, asks about units, runs the same checks on every CAD route and prints them in the report, measures a file once instead of four times, and widens its confidence range when a number was typed rather than measured.</a:t>
             </a:r>
           </a:p>
         </p:txBody>
@@ -40261,7 +40933,7 @@
         </p:nvSpPr>
         <p:spPr>
           <a:xfrm>
-            <a:off x="548640" y="1737360"/>
+            <a:off x="548640" y="1664208"/>
             <a:ext cx="2651760" cy="1691640"/>
           </a:xfrm>
           <a:prstGeom prst="roundRect">
@@ -40309,7 +40981,7 @@
         </p:nvSpPr>
         <p:spPr>
           <a:xfrm>
-            <a:off x="548640" y="1737360"/>
+            <a:off x="548640" y="1664208"/>
             <a:ext cx="2651760" cy="54864"/>
           </a:xfrm>
           <a:prstGeom prst="rect">
@@ -40353,7 +41025,7 @@
         </p:nvSpPr>
         <p:spPr>
           <a:xfrm>
-            <a:off x="1591056" y="1901952"/>
+            <a:off x="1591056" y="1828800"/>
             <a:ext cx="566928" cy="566928"/>
           </a:xfrm>
           <a:prstGeom prst="ellipse">
@@ -40405,7 +41077,7 @@
         </p:blipFill>
         <p:spPr>
           <a:xfrm>
-            <a:off x="1738457" y="2049353"/>
+            <a:off x="1738457" y="1976201"/>
             <a:ext cx="272126" cy="272126"/>
           </a:xfrm>
           <a:prstGeom prst="rect">
@@ -40421,7 +41093,7 @@
         </p:nvSpPr>
         <p:spPr>
           <a:xfrm>
-            <a:off x="621792" y="2578608"/>
+            <a:off x="621792" y="2505456"/>
             <a:ext cx="2505456" cy="310896"/>
           </a:xfrm>
           <a:prstGeom prst="rect">
@@ -40463,7 +41135,7 @@
         </p:nvSpPr>
         <p:spPr>
           <a:xfrm>
-            <a:off x="621792" y="2907792"/>
+            <a:off x="621792" y="2834640"/>
             <a:ext cx="2505456" cy="466344"/>
           </a:xfrm>
           <a:prstGeom prst="rect">
@@ -40505,7 +41177,7 @@
         </p:nvSpPr>
         <p:spPr>
           <a:xfrm>
-            <a:off x="3227832" y="2468880"/>
+            <a:off x="3227832" y="2395728"/>
             <a:ext cx="219456" cy="201168"/>
           </a:xfrm>
           <a:prstGeom prst="rightArrow">
@@ -40549,7 +41221,7 @@
         </p:nvSpPr>
         <p:spPr>
           <a:xfrm>
-            <a:off x="3474720" y="1737360"/>
+            <a:off x="3474720" y="1664208"/>
             <a:ext cx="2651760" cy="1691640"/>
           </a:xfrm>
           <a:prstGeom prst="roundRect">
@@ -40597,7 +41269,7 @@
         </p:nvSpPr>
         <p:spPr>
           <a:xfrm>
-            <a:off x="3474720" y="1737360"/>
+            <a:off x="3474720" y="1664208"/>
             <a:ext cx="2651760" cy="54864"/>
           </a:xfrm>
           <a:prstGeom prst="rect">
@@ -40649,7 +41321,7 @@
         </p:blipFill>
         <p:spPr>
           <a:xfrm>
-            <a:off x="4664537" y="2049353"/>
+            <a:off x="4664537" y="1976201"/>
             <a:ext cx="272126" cy="272126"/>
           </a:xfrm>
           <a:prstGeom prst="rect">
@@ -40665,7 +41337,7 @@
         </p:nvSpPr>
         <p:spPr>
           <a:xfrm>
-            <a:off x="3547872" y="2578608"/>
+            <a:off x="3547872" y="2505456"/>
             <a:ext cx="2505456" cy="310896"/>
           </a:xfrm>
           <a:prstGeom prst="rect">
@@ -40707,7 +41379,7 @@
         </p:nvSpPr>
         <p:spPr>
           <a:xfrm>
-            <a:off x="3547872" y="2907792"/>
+            <a:off x="3547872" y="2834640"/>
             <a:ext cx="2505456" cy="466344"/>
           </a:xfrm>
           <a:prstGeom prst="rect">
@@ -40749,7 +41421,7 @@
         </p:nvSpPr>
         <p:spPr>
           <a:xfrm>
-            <a:off x="6153912" y="2468880"/>
+            <a:off x="6153912" y="2395728"/>
             <a:ext cx="219456" cy="201168"/>
           </a:xfrm>
           <a:prstGeom prst="rightArrow">
@@ -40793,7 +41465,7 @@
         </p:nvSpPr>
         <p:spPr>
           <a:xfrm>
-            <a:off x="6400800" y="1737360"/>
+            <a:off x="6400800" y="1664208"/>
             <a:ext cx="2651760" cy="1691640"/>
           </a:xfrm>
           <a:prstGeom prst="roundRect">
@@ -40841,7 +41513,7 @@
         </p:nvSpPr>
         <p:spPr>
           <a:xfrm>
-            <a:off x="6400800" y="1737360"/>
+            <a:off x="6400800" y="1664208"/>
             <a:ext cx="2651760" cy="54864"/>
           </a:xfrm>
           <a:prstGeom prst="rect">
@@ -40885,7 +41557,7 @@
         </p:nvSpPr>
         <p:spPr>
           <a:xfrm>
-            <a:off x="7443216" y="1901952"/>
+            <a:off x="7443216" y="1828800"/>
             <a:ext cx="566928" cy="566928"/>
           </a:xfrm>
           <a:prstGeom prst="ellipse">
@@ -40937,7 +41609,7 @@
         </p:blipFill>
         <p:spPr>
           <a:xfrm>
-            <a:off x="7590617" y="2049353"/>
+            <a:off x="7590617" y="1976201"/>
             <a:ext cx="272126" cy="272126"/>
           </a:xfrm>
           <a:prstGeom prst="rect">
@@ -40953,7 +41625,7 @@
         </p:nvSpPr>
         <p:spPr>
           <a:xfrm>
-            <a:off x="6473952" y="2578608"/>
+            <a:off x="6473952" y="2505456"/>
             <a:ext cx="2505456" cy="310896"/>
           </a:xfrm>
           <a:prstGeom prst="rect">
@@ -40995,7 +41667,7 @@
         </p:nvSpPr>
         <p:spPr>
           <a:xfrm>
-            <a:off x="6473952" y="2907792"/>
+            <a:off x="6473952" y="2834640"/>
             <a:ext cx="2505456" cy="466344"/>
           </a:xfrm>
           <a:prstGeom prst="rect">
@@ -41037,7 +41709,7 @@
         </p:nvSpPr>
         <p:spPr>
           <a:xfrm>
-            <a:off x="9079992" y="2468880"/>
+            <a:off x="9079992" y="2395728"/>
             <a:ext cx="219456" cy="201168"/>
           </a:xfrm>
           <a:prstGeom prst="rightArrow">
@@ -41081,7 +41753,7 @@
         </p:nvSpPr>
         <p:spPr>
           <a:xfrm>
-            <a:off x="9326880" y="1737360"/>
+            <a:off x="9326880" y="1664208"/>
             <a:ext cx="2651760" cy="1691640"/>
           </a:xfrm>
           <a:prstGeom prst="roundRect">
@@ -41129,7 +41801,7 @@
         </p:nvSpPr>
         <p:spPr>
           <a:xfrm>
-            <a:off x="9326880" y="1737360"/>
+            <a:off x="9326880" y="1664208"/>
             <a:ext cx="2651760" cy="54864"/>
           </a:xfrm>
           <a:prstGeom prst="rect">
@@ -41173,7 +41845,7 @@
         </p:nvSpPr>
         <p:spPr>
           <a:xfrm>
-            <a:off x="10369296" y="1901952"/>
+            <a:off x="10369296" y="1828800"/>
             <a:ext cx="566928" cy="566928"/>
           </a:xfrm>
           <a:prstGeom prst="ellipse">
@@ -41225,7 +41897,7 @@
         </p:blipFill>
         <p:spPr>
           <a:xfrm>
-            <a:off x="10516697" y="2049353"/>
+            <a:off x="10516697" y="1976201"/>
             <a:ext cx="272126" cy="272126"/>
           </a:xfrm>
           <a:prstGeom prst="rect">
@@ -41241,7 +41913,7 @@
         </p:nvSpPr>
         <p:spPr>
           <a:xfrm>
-            <a:off x="9400032" y="2578608"/>
+            <a:off x="9400032" y="2505456"/>
             <a:ext cx="2505456" cy="310896"/>
           </a:xfrm>
           <a:prstGeom prst="rect">
@@ -41283,7 +41955,7 @@
         </p:nvSpPr>
         <p:spPr>
           <a:xfrm>
-            <a:off x="9400032" y="2907792"/>
+            <a:off x="9400032" y="2834640"/>
             <a:ext cx="2505456" cy="466344"/>
           </a:xfrm>
           <a:prstGeom prst="rect">
@@ -41325,8 +41997,8 @@
         </p:nvSpPr>
         <p:spPr>
           <a:xfrm>
-            <a:off x="411480" y="3657600"/>
-            <a:ext cx="5577840" cy="1874519"/>
+            <a:off x="411480" y="3529584"/>
+            <a:ext cx="5577840" cy="2103120"/>
           </a:xfrm>
           <a:prstGeom prst="roundRect">
             <a:avLst>
@@ -41373,8 +42045,8 @@
         </p:nvSpPr>
         <p:spPr>
           <a:xfrm>
-            <a:off x="411480" y="3657600"/>
-            <a:ext cx="68580" cy="1874519"/>
+            <a:off x="411480" y="3529584"/>
+            <a:ext cx="68580" cy="2103120"/>
           </a:xfrm>
           <a:prstGeom prst="rect">
             <a:avLst/>
@@ -41417,7 +42089,7 @@
         </p:nvSpPr>
         <p:spPr>
           <a:xfrm>
-            <a:off x="612648" y="3785616"/>
+            <a:off x="612648" y="3657600"/>
             <a:ext cx="5212080" cy="274320"/>
           </a:xfrm>
           <a:prstGeom prst="rect">
@@ -41459,8 +42131,8 @@
         </p:nvSpPr>
         <p:spPr>
           <a:xfrm>
-            <a:off x="612648" y="4096512"/>
-            <a:ext cx="5212080" cy="1325879"/>
+            <a:off x="612648" y="3968496"/>
+            <a:ext cx="5212080" cy="1554480"/>
           </a:xfrm>
           <a:prstGeom prst="rect">
             <a:avLst/>
@@ -41574,7 +42246,7 @@
                 </a:solidFill>
                 <a:latin typeface="Calibri"/>
               </a:rPr>
-              <a:t>Moves about 5,700 lines of measuring and reading</a:t>
+              <a:t>Moves five pieces of software, about 14,300 lines,</a:t>
             </a:r>
           </a:p>
           <a:p>
@@ -41593,7 +42265,7 @@
                 </a:solidFill>
                 <a:latin typeface="Calibri"/>
               </a:rPr>
-              <a:t>code, plus the safety checks that go with it.</a:t>
+              <a:t>with the safety checks. Slide 7 lists them.</a:t>
             </a:r>
           </a:p>
         </p:txBody>
@@ -41606,8 +42278,8 @@
         </p:nvSpPr>
         <p:spPr>
           <a:xfrm>
-            <a:off x="6199632" y="3657600"/>
-            <a:ext cx="5577840" cy="1874519"/>
+            <a:off x="6199632" y="3529584"/>
+            <a:ext cx="5577840" cy="2103120"/>
           </a:xfrm>
           <a:prstGeom prst="roundRect">
             <a:avLst>
@@ -41654,8 +42326,8 @@
         </p:nvSpPr>
         <p:spPr>
           <a:xfrm>
-            <a:off x="6199632" y="3657600"/>
-            <a:ext cx="68580" cy="1874519"/>
+            <a:off x="6199632" y="3529584"/>
+            <a:ext cx="68580" cy="2103120"/>
           </a:xfrm>
           <a:prstGeom prst="rect">
             <a:avLst/>
@@ -41698,7 +42370,7 @@
         </p:nvSpPr>
         <p:spPr>
           <a:xfrm>
-            <a:off x="6400800" y="3785616"/>
+            <a:off x="6400800" y="3657600"/>
             <a:ext cx="5212080" cy="274320"/>
           </a:xfrm>
           <a:prstGeom prst="rect">
@@ -41740,8 +42412,8 @@
         </p:nvSpPr>
         <p:spPr>
           <a:xfrm>
-            <a:off x="6400800" y="4096512"/>
-            <a:ext cx="5212080" cy="1325879"/>
+            <a:off x="6400800" y="3968496"/>
+            <a:ext cx="5212080" cy="1554480"/>
           </a:xfrm>
           <a:prstGeom prst="rect">
             <a:avLst/>
@@ -41855,7 +42527,7 @@
                 </a:solidFill>
                 <a:latin typeface="Calibri"/>
               </a:rPr>
-              <a:t>Same engine, same rates, same checks. The new work</a:t>
+              <a:t>Same engine and the same rates. The new work is the</a:t>
             </a:r>
           </a:p>
           <a:p>
@@ -41874,7 +42546,7 @@
                 </a:solidFill>
                 <a:latin typeface="Calibri"/>
               </a:rPr>
-              <a:t>is the run itself and keeping a record of it.</a:t>
+              <a:t>run, its record, and wiring the checks onto it.</a:t>
             </a:r>
           </a:p>
         </p:txBody>
@@ -47642,7 +48314,7 @@
                 </a:solidFill>
                 <a:latin typeface="Calibri"/>
               </a:rPr>
-              <a:t>Works out 182 values and decides what the engineer gets asked.</a:t>
+              <a:t>165 costing rules that fill the form and decide what the engineer gets asked.</a:t>
             </a:r>
           </a:p>
         </p:txBody>
@@ -49309,7 +49981,7 @@
                 </a:solidFill>
                 <a:latin typeface="Calibri"/>
               </a:rPr>
-              <a:t>If the AI reads 2 kg off the drawing and the model measures 1.4 kg, we use the measured figure. The geometry wins.</a:t>
+              <a:t>If the AI reads 2 kg off the drawing and the model measures 1.4 kg, we use the measured figure. A disagreement the other way is flagged to the engineer, and a gap of more than half stops the costing until someone accepts it.</a:t>
             </a:r>
           </a:p>
         </p:txBody>

--- a/CostVision-CAPEE-Implementation-Options.pptx
+++ b/CostVision-CAPEE-Implementation-Options.pptx
@@ -665,7 +665,7 @@
           <a:lstStyle/>
           <a:p>
             <a:r>
-              <a:t>This is what we would actually get out of the trial, and I want to be concrete because these four numbers do not exist today. First, how close is it. We cost the parts, compare against what we paid, and report the error. The test I would use is whether the real error lands inside the range the tool predicted for itself. A tool that is wrong and says so is usable. One that is wrong and confident is not. Second, how often the engineer has to step in. On our own eight test parts, once the material family was given, six went straight through and two stopped and asked. Given nothing at all, all eight stop and ask, because a solid model cannot tell steel from aluminium. In a bulk run that answer comes off the part master rather than from a person. I need that figure on JLR parts. Third, the time saving, measured by doing the same parts both ways. Fourth, what it refused and whether it was right to. And the green strip is the reason to do it even if the answer disappoints us. Right now nobody can state an accuracy figure at all, and every conversation about this tool stops there.</a:t>
+              <a:t>This is what we would actually get out of the trial, and I want to be concrete because these four numbers do not exist today. First, how close is it. We cost the parts, compare against what we paid, and report the error. The test I would use is whether the real error lands inside the range the tool predicted for itself. A tool that is wrong and says so is usable. One that is wrong and confident is not. Second, how often the engineer has to step in. On our own eight test parts, once the material family was given, six went straight through and two stopped and asked. Given nothing at all, all eight stop and ask, because a solid model cannot tell steel from aluminium. In a bulk run that answer would come off the part master rather than from a person. I need that figure on JLR parts. Third, the time saving, measured by doing the same parts both ways. Fourth, what it refused and whether it was right to. And the green strip is the reason to do it even if the answer disappoints us. Right now nobody can state an accuracy figure at all, and every conversation about this tool stops there.</a:t>
             </a:r>
           </a:p>
         </p:txBody>
@@ -875,7 +875,7 @@
           <a:lstStyle/>
           <a:p>
             <a:r>
-              <a:t>Here is what a run actually does and what it costs in machine time. The forty-part row is measured, this month, on our own production parts. A part takes between one and three seconds to measure depending on how big the file is. Running the rules and costing it takes five thousandths of a second, so the measuring is the whole of it. Forty parts took thirty-one seconds on two workers with nothing reused, and the rows below that are that same rate carried forward, so five hundred parts is about six and a half minutes. The point of the blue strip at the bottom is that the computer is not the constraint here. Pulling together the part list, the CAD files and our own rate data is the work. The machine finishes while you are getting a coffee.</a:t>
+              <a:t>Here is what a run actually does and what it costs in machine time. The forty-part row is measured, this month, on our own production parts. A part takes between one and three seconds to measure depending on how big the file is. Running the rules and costing it takes half a thousandth of a second, so the measuring is the whole of it. Forty parts took thirty-one seconds on two workers with nothing reused, and the rows below that are that same rate carried forward, so five hundred parts is about six and a half minutes. The point of the blue strip at the bottom is that the computer is not the constraint here. Pulling together the part list, the CAD files and our own rate data is the work. The machine finishes while you are getting a coffee.</a:t>
             </a:r>
           </a:p>
         </p:txBody>
@@ -945,7 +945,7 @@
           <a:lstStyle/>
           <a:p>
             <a:r>
-              <a:t>I would rather show you this list than have it come out later. Six things. The first two are the ones that would stop me signing off a bulk run for anything audited. The rate book today is a single row that gets overwritten, so change a rate and the old one is gone. And finished costings are not saved at all. Together that means a five-hundred-part run produces numbers you cannot reproduce next quarter. The third is smaller than it sounds: region and volume already work in the screens, they are just not passed through to the automated route. Fourth, gear does not reach the automated route at all, so a basket with gears in it would quietly skip them. Fifth is the geometry safety checks. They run on the CAD route today and the automated route only validates the fields, so they have to be wired on before anyone leaves a run unattended. Sixth is the run itself, which is the actual new build. The green strip is the good news. The engine needs no change. We checked that by running it on its own, outside the application.</a:t>
+              <a:t>I would rather show you this list than have it come out later. Six things. The first two are the ones that would stop me signing off a bulk run for anything audited. The rate book today is a single row that gets overwritten, so change a rate and the old one is gone. And a costing is only kept if somebody saves it by hand, with nothing recording which rates produced it. Together that means a five-hundred-part run produces numbers you cannot reproduce next quarter. The third is smaller than it sounds: region and volume already work in the screens, they are just not passed through to the automated route. Fourth, gear does not reach the automated route at all, so a basket with gears in it would quietly skip them. Fifth is the geometry safety checks. They run on the CAD route today and the automated route only validates the fields, so they have to be wired on before anyone leaves a run unattended. Sixth is the run itself, which is the actual new build. The green strip is the good news. The engine needs no change. We checked that by running it on its own, outside the application.</a:t>
             </a:r>
           </a:p>
         </p:txBody>
@@ -1085,7 +1085,7 @@
           <a:lstStyle/>
           <a:p>
             <a:r>
-              <a:t>Six steps for Option two. Step one is our own rate data and it is worth starting whatever we decide, because both options need it. Steps two and three are the prerequisites I showed you two slides ago: a history of rate changes, and saved costings. They are not part of the run itself, they are what makes a run mean anything three months later. Step four is small but it is not optional, because a basket costed at UK rates when it should have been Poland is just wrong. Step five is the actual new build. Step six is a trial on a real basket, run beside how we cost today so we can compare.</a:t>
+              <a:t>Six steps for Option two. Step one is our own rate data and it is worth starting whatever we decide, because both options need it. Steps two and three are the prerequisites I showed you two slides ago: a history of rate changes, and an automatic record of every costing. They are not part of the run itself, they are what makes a run mean anything three months later. Step four is a set of small things that are not optional: a basket costed at UK rates when it should have been Poland is just wrong, and the geometry checks have to run on this route too. Step five is the actual new build. Step six is a trial on a real basket, run beside how we cost today so we can compare.</a:t>
             </a:r>
           </a:p>
         </p:txBody>
@@ -1155,7 +1155,7 @@
           <a:lstStyle/>
           <a:p>
             <a:r>
-              <a:t>The top half is fairly even and each option wins some rows. The two I would look at are the last two. Option one produces the accuracy figure that Option two leans on. And Option one is audit-ready today, because CAPEE keeps the record exactly as it does now, whereas Option two is not audit-ready until we have built the rate history and the saved costings. Those two rows are the whole argument for doing them in this order.</a:t>
+              <a:t>The top half is fairly even and each option wins some rows. The two I would look at are the last two. Option one produces the accuracy figure that Option two leans on. And Option one is audit-ready today, because CAPEE keeps the record exactly as it does now, whereas Option two is not audit-ready until we have built the rate history and the costing record. Those two rows are the whole argument for doing them in this order.</a:t>
             </a:r>
           </a:p>
         </p:txBody>
@@ -1225,7 +1225,7 @@
           <a:lstStyle/>
           <a:p>
             <a:r>
-              <a:t>Eight items. The top one is the one that would stop me putting this in front of a supplier today, and approving the trial is what fixes it. The second is the one that would stop me signing off a bulk run for anything audited, and it is a build, not a mystery. The third is waiting on IT. The fourth is small but I have put it up because a basket costed at the wrong region is wrong in a way nobody would notice. And the last row is worth saying plainly: the tool is still being worked on, so for any trial we pin a version and stay on it. Note also that the CAD file itself never leaves the server.</a:t>
+              <a:t>Eight items. The top one is the one that would stop me putting this in front of a supplier today, and approving the trial is what fixes it. The second is the one that would stop me signing off a bulk run for anything audited, and it is a build, not a mystery. The third is waiting on IT. The fourth is small but I have put it up because a basket costed at the wrong region is wrong in a way nobody would notice. And the last row is worth saying plainly: the tool is still being worked on, so for any trial we pin a version and stay on it. One clarification on the sixth row, because it always comes up: what goes out is the drawing PDF and rendered pictures of the shape. The CAD file itself never leaves the server, and the deterministic setting sends nothing at all.</a:t>
             </a:r>
           </a:p>
         </p:txBody>
@@ -1295,7 +1295,7 @@
           <a:lstStyle/>
           <a:p>
             <a:r>
-              <a:t>This is the ask, so I will put it first. I want approval to run a proof of concept inside CAPEE, on one part type, using parts we have already bought. What we need from JLR is on the second row and I will come back to it at the end. What it costs is our own time. There is no licence and the business does not have to learn a new tool, because CAPEE does not change. The amber box is the honest bit and I would rather say it now than have it come out in questions. We have never compared this tool against a price we actually paid. That is the whole point of the proof of concept.</a:t>
+              <a:t>This is the ask, so I will put it first. I want approval to run a proof of concept inside CAPEE, on one part type, using parts we have already bought. What we need from JLR is on the second row and I will come back to it at the end. What it costs is our own time. There is no licence and nobody has to learn a new tool. CAPEE still does the costing on the same screens. It does have to be changed to take the numbers, and that sits on JLR's side of the work on slide six. The amber box is the honest bit and I would rather say it now than have it come out in questions. We have never compared this tool against a price we actually paid. That is the whole point of the proof of concept.</a:t>
             </a:r>
           </a:p>
         </p:txBody>
@@ -1505,7 +1505,7 @@
           <a:lstStyle/>
           <a:p>
             <a:r>
-              <a:t>This is the problem we are trying to fix. Today an engineer opens the model, reads the drawing, and types the numbers in. How many numbers depends on the part. A machined part is twelve boxes. A pressing is sixty-nine. The time matters, but the second point matters more. Two of our engineers costing the same part will not type the same numbers, so we end up with two answers for one part and no way to say which is right. On the right is what the tool does instead. A hundred and sixty-five costing rules turn the measurements into the values the form needs, and a hundred and forty-nine of those write straight into a named box. One part uses its own type's rules, between nine and eighteen of them. The blue box is the distinction I want people to hold on to. Measuring the model is ordinary software doing geometry. The AI only reads the writing on the drawing, and we check everything it reads.</a:t>
+              <a:t>This is the problem we are trying to fix. Today an engineer opens the model, reads the drawing, and types the numbers in. How many numbers depends on the part. A machined part is twelve boxes. A pressing is sixty-nine. The time matters, but the second point matters more. Two of our engineers costing the same part will not type the same numbers, so we end up with two answers for one part and no way to say which is right. On the right is what the tool does instead. A hundred and sixty-five costing rules turn the measurements into the values the form needs, and a hundred and forty-nine of those write straight into a named box. One part uses its own type's rules, between nine and eighteen of them. The blue box is the distinction I want people to hold on to. Measuring the model is ordinary software doing geometry. The AI reads the drawing and looks at rendered pictures of the shape, and we check everything it gives back against the measurements.</a:t>
             </a:r>
           </a:p>
         </p:txBody>
@@ -1575,7 +1575,7 @@
           <a:lstStyle/>
           <a:p>
             <a:r>
-              <a:t>Before the options, this is honestly where the tool is. Left side is working today and I checked every line of it against the software this week. Nineteen part types cost through the engine. The maths repeats. It measures models with no internet connection, which is the first thing IT security will ask about. Right side is what is not done. The top one is the important one and I will keep coming back to it. Below that, it does not keep a history when someone changes a rate and it does not save finished costings, so today you could not reproduce a costing from three months ago. Those two matter a lot for Option two and I will come back to them. The blue box is what has changed since I last showed you this. The headline is that it now refuses work it cannot do honestly.</a:t>
+              <a:t>Before the options, this is honestly where the tool is. Left side is working today and I checked every line of it against the software this week. Nineteen part types cost through the engine. The maths repeats. It measures models with no internet connection, which is the first thing IT security will ask about. Right side is what is not done. The top one is the important one and I will keep coming back to it. Below that, it does not keep a history when someone changes a rate, and it keeps no automatic record of a costing. Somebody can save a scenario or make a share link, but nothing ties either to the rates that produced it, so today you could not reproduce a costing from three months ago. Those two matter a lot for Option two and I will come back to them. The blue box is what has changed since I last showed you this. The headline is that it now refuses work it cannot do honestly.</a:t>
             </a:r>
           </a:p>
         </p:txBody>
@@ -1855,7 +1855,7 @@
           <a:lstStyle/>
           <a:p>
             <a:r>
-              <a:t>On a job like this the temptation is to take the measuring and the AI and leave what looks like plumbing until later. These four checks are what make the rest safe. The first one is the one to remember. If the AI and the measured model disagree, the model wins. The last one matters for a different reason. Where the tool cannot know something it asks rather than guessing, and it never pre-ticks its own answer. The red box is from our own review. We found a route with no checks that gave back a nonsense figure while saying it had worked, and we found that a part exported as surfaces got costed at a wrong weight. Both of those now stop rather than produce a number.</a:t>
+              <a:t>On a job like this the temptation is to take the measuring and the AI and leave what looks like plumbing until later. These four checks are what make the rest safe. The first one is the one to remember. If the AI claims a heavier part than the model measures, the model wins. A disagreement the other way is flagged to the engineer, and a big gap stops the costing. The last one matters for a different reason. Where the tool cannot know something it asks rather than guessing, and it never pre-ticks its own answer. The red box is from our own review. We found a route with no checks that gave back a nonsense figure while saying it had worked, and we found that a part exported as surfaces got costed at a wrong weight. Both of those now stop rather than produce a number.</a:t>
             </a:r>
           </a:p>
         </p:txBody>
@@ -1925,7 +1925,7 @@
           <a:lstStyle/>
           <a:p>
             <a:r>
-              <a:t>Hardcoded values is a phrase that means nothing on its own, so here are six real ones. Look at the third row. A rejected plated part costs about four and a half times a good one, because you strip it and start again. That is why a three percent reject rate is closer to thirteen percent on cost. That is an engineering judgement and exactly the sort of thing you would challenge in a review, so it should not be buried in code. We pull every one of them into a single list you can read and change. The amber box is the caveat. These are our estimates, not measurements from one of our plants.</a:t>
+              <a:t>Hardcoded values is a phrase that means nothing on its own, so here are six real ones. Look at the third row. Stripping and re-plating a rejected part is costed as its own stage, at two dollars twenty of chemistry and one dollar eighty of effluent per square metre, charged on top of plating the part again. The note written against it says the whole rework runs four to five times a first-pass part, which is why a three percent reject rate is nearer twelve to fifteen percent on cost. That is an engineering judgement and exactly the sort of thing you would challenge in a review, so it should not be buried in code. We pull every one of them into a single list you can read and change. The amber box is the caveat. These are our estimates, not measurements from one of our plants.</a:t>
             </a:r>
           </a:p>
         </p:txBody>
@@ -15324,7 +15324,7 @@
                 </a:solidFill>
                 <a:latin typeface="Calibri"/>
               </a:rPr>
-              <a:t>5 milliseconds</a:t>
+              <a:t>under 1 millisecond</a:t>
             </a:r>
           </a:p>
         </p:txBody>
@@ -15412,7 +15412,7 @@
                 </a:solidFill>
                 <a:latin typeface="Calibri"/>
               </a:rPr>
-              <a:t>Rules plus the eight-bucket engine. Not the slow part</a:t>
+              <a:t>Rules 0.5 ms, eight-bucket engine 0.01 ms. Not the slow part</a:t>
             </a:r>
           </a:p>
         </p:txBody>
@@ -17797,7 +17797,7 @@
                 </a:solidFill>
                 <a:latin typeface="Calibri"/>
               </a:rPr>
-              <a:t>Saved costings</a:t>
+              <a:t>An automatic record of every costing</a:t>
             </a:r>
           </a:p>
         </p:txBody>
@@ -17973,7 +17973,7 @@
                 </a:solidFill>
                 <a:latin typeface="Calibri"/>
               </a:rPr>
-              <a:t>Finished costings are not stored anywhere. A five-hundred-part run would produce numbers with nowhere to live and no way to reproduce them.</a:t>
+              <a:t>A costing is kept only if somebody saves a scenario or makes a share link, which expires. Nothing is recorded automatically and nothing names the rates used, so a five-hundred-part run could not be reproduced.</a:t>
             </a:r>
           </a:p>
         </p:txBody>
@@ -23259,7 +23259,7 @@
                 </a:solidFill>
                 <a:latin typeface="Calibri"/>
               </a:rPr>
-              <a:t>Save finished costings</a:t>
+              <a:t>Record every costing automatically</a:t>
             </a:r>
           </a:p>
         </p:txBody>
@@ -23301,7 +23301,7 @@
                 </a:solidFill>
                 <a:latin typeface="Calibri"/>
               </a:rPr>
-              <a:t>A stored record per part: inputs, rates, answers, result. Without this a bulk run cannot be reproduced.</a:t>
+              <a:t>Inputs, rates, answers and result stored per part. Saving one by hand is not a record a bulk run can rest on.</a:t>
             </a:r>
           </a:p>
         </p:txBody>
@@ -23530,7 +23530,7 @@
                 </a:solidFill>
                 <a:latin typeface="Calibri"/>
               </a:rPr>
-              <a:t>Pass region and annual volume through, and register gear. Small work, and a basket is wrong without it.</a:t>
+              <a:t>Pass region and annual volume through, register gear, and wire the geometry checks on. A basket is wrong without them.</a:t>
             </a:r>
           </a:p>
         </p:txBody>
@@ -25354,7 +25354,7 @@
                 </a:solidFill>
                 <a:latin typeface="Calibri"/>
               </a:rPr>
-              <a:t>CAPEE, unchanged</a:t>
+              <a:t>CAPEE, same as now</a:t>
             </a:r>
           </a:p>
         </p:txBody>
@@ -26674,7 +26674,7 @@
                 </a:solidFill>
                 <a:latin typeface="Calibri"/>
               </a:rPr>
-              <a:t>Yes, nothing in CAPEE has changed</a:t>
+              <a:t>Yes, CAPEE costs the same way either way</a:t>
             </a:r>
           </a:p>
         </p:txBody>
@@ -27290,7 +27290,7 @@
                 </a:solidFill>
                 <a:latin typeface="Calibri"/>
               </a:rPr>
-              <a:t>No, until rate history and saved costings exist</a:t>
+              <a:t>No, until rate history and a costing record exist</a:t>
             </a:r>
           </a:p>
         </p:txBody>
@@ -27464,7 +27464,7 @@
                 </a:solidFill>
                 <a:latin typeface="Calibri"/>
               </a:rPr>
-              <a:t>Option 1 produces the accuracy figure that Option 2 leans on, and Option 1 is audit-ready today because CAPEE keeps the record. Option 2 is not, until the rate history and the saved costings exist. That is the whole argument for this order.</a:t>
+              <a:t>Option 1 produces the accuracy figure that Option 2 leans on, and Option 1 is audit-ready today because CAPEE keeps the record. Option 2 is not, until the rate history and the costing record exist. That is the whole argument for this order.</a:t>
             </a:r>
           </a:p>
         </p:txBody>
@@ -28795,7 +28795,7 @@
                 </a:solidFill>
                 <a:latin typeface="Calibri"/>
               </a:rPr>
-              <a:t>No rate history and no saved costings. Has to be built before bulk is used for anything audited.</a:t>
+              <a:t>No rate history, and no automatic record of a costing. Both have to be built before bulk is used for anything audited.</a:t>
             </a:r>
           </a:p>
         </p:txBody>
@@ -30027,7 +30027,7 @@
                 </a:solidFill>
                 <a:latin typeface="Calibri"/>
               </a:rPr>
-              <a:t>Drawing text goes to an AI service</a:t>
+              <a:t>The drawing and rendered views go to an AI service</a:t>
             </a:r>
           </a:p>
         </p:txBody>
@@ -30203,7 +30203,7 @@
                 </a:solidFill>
                 <a:latin typeface="Calibri"/>
               </a:rPr>
-              <a:t>Short extracts only, and it can go through a JLR service. The CAD file itself stays on the server.</a:t>
+              <a:t>The whole drawing PDF goes, plus up to four pictures of the shape rendered from the model. The CAD file itself never leaves the server, and it can run through a JLR service.</a:t>
             </a:r>
           </a:p>
         </p:txBody>
@@ -32363,7 +32363,7 @@
                 </a:solidFill>
                 <a:latin typeface="Calibri"/>
               </a:rPr>
-              <a:t>Our own engineering time. No licence, no new tool for the business to learn, CAPEE unchanged</a:t>
+              <a:t>Our own engineering time. No licence and no new tool to learn. CAPEE still does the costing, but it has to be changed to take the numbers</a:t>
             </a:r>
           </a:p>
         </p:txBody>
@@ -36476,7 +36476,7 @@
                 </a:solidFill>
                 <a:latin typeface="Calibri"/>
               </a:rPr>
-              <a:t>Measuring happens locally; only drawing text goes to an AI service</a:t>
+              <a:t>Measured locally. The drawing PDF and rendered views go out; the CAD file never does</a:t>
             </a:r>
           </a:p>
         </p:txBody>
@@ -39257,7 +39257,7 @@
                 </a:solidFill>
                 <a:latin typeface="Calibri"/>
               </a:rPr>
-              <a:t>The 3D model is measured by software, in the way a CMM measures a part. That is not AI. The AI only reads the words written on the drawing, and everything it reads is checked against the measured model before it can move a cost. Slide 8 covers those checks. On the deterministic setting the AI is switched off completely and the part still costs.</a:t>
+              <a:t>The 3D model is measured by software, in the way a CMM measures a part. That is not AI. The AI reads the drawing and looks at pictures of the shape rendered from the model, and everything it hands back is checked against the measurements before it can move a cost. Slide 8 covers those checks. On the deterministic setting the AI is switched off completely and the part still costs.</a:t>
             </a:r>
           </a:p>
         </p:txBody>
@@ -40246,7 +40246,7 @@
                 </a:solidFill>
                 <a:latin typeface="Calibri"/>
               </a:rPr>
-              <a:t>Finished costings are not saved, so an old one cannot</a:t>
+              <a:t>No automatic record of a costing, so an old one cannot</a:t>
             </a:r>
           </a:p>
           <a:p>
@@ -52132,7 +52132,7 @@
                 </a:solidFill>
                 <a:latin typeface="Calibri"/>
               </a:rPr>
-              <a:t>Cost of a rejected plated part</a:t>
+              <a:t>Rework of a rejected plated part</a:t>
             </a:r>
           </a:p>
         </p:txBody>
@@ -52220,7 +52220,7 @@
                 </a:solidFill>
                 <a:latin typeface="Calibri"/>
               </a:rPr>
-              <a:t>4.5x a good one</a:t>
+              <a:t>USD 2.20 + 1.80 / m²</a:t>
             </a:r>
           </a:p>
         </p:txBody>
@@ -52308,7 +52308,7 @@
                 </a:solidFill>
                 <a:latin typeface="Calibri"/>
               </a:rPr>
-              <a:t>You strip it and plate it again, so a 3% reject rate is nearer 13% on cost</a:t>
+              <a:t>Strip-and-re-plate chemistry and effluent, on top of plating it again. The note on the stage reads 4-5x a first-pass part</a:t>
             </a:r>
           </a:p>
         </p:txBody>
